--- a/lecons/F4/53_F4_M2_L41_Fish_Resources_and_their_Management.pptx
+++ b/lecons/F4/53_F4_M2_L41_Fish_Resources_and_their_Management.pptx
@@ -13167,7 +13167,7 @@
         <p:spPr>
           <a:xfrm>
             <a:off x="0" y="658368"/>
-            <a:ext cx="3840480" cy="5833872"/>
+            <a:ext cx="5120640" cy="5833872"/>
           </a:xfrm>
           <a:prstGeom prst="rect">
             <a:avLst/>
@@ -13182,8 +13182,8 @@
         </p:nvSpPr>
         <p:spPr>
           <a:xfrm>
-            <a:off x="4069080" y="1005840"/>
-            <a:ext cx="7802575" cy="731520"/>
+            <a:off x="5349240" y="1005840"/>
+            <a:ext cx="6522415" cy="731520"/>
           </a:xfrm>
           <a:prstGeom prst="rect">
             <a:avLst/>
@@ -13223,8 +13223,8 @@
         </p:nvSpPr>
         <p:spPr>
           <a:xfrm>
-            <a:off x="4069080" y="1783080"/>
-            <a:ext cx="7802575" cy="4663440"/>
+            <a:off x="5349240" y="1783080"/>
+            <a:ext cx="6522415" cy="4663440"/>
           </a:xfrm>
           <a:prstGeom prst="rect">
             <a:avLst/>
@@ -13243,7 +13243,7 @@
               <a:buNone/>
             </a:pPr>
             <a:r>
-              <a:rPr lang="en-US" sz="4000" b="1" dirty="0">
+              <a:rPr lang="en-US" sz="3200" b="1" dirty="0">
                 <a:solidFill>
                   <a:srgbClr val="111111"/>
                 </a:solidFill>
@@ -13253,7 +13253,7 @@
               </a:rPr>
               <a:t>Topic: Management of Primary Resources</a:t>
             </a:r>
-            <a:endParaRPr lang="en-US" sz="4000" dirty="0"/>
+            <a:endParaRPr lang="en-US" sz="3200" dirty="0"/>
           </a:p>
           <a:p>
             <a:pPr algn="l" indent="0" marL="0">
@@ -13263,7 +13263,7 @@
               <a:buNone/>
             </a:pPr>
             <a:r>
-              <a:rPr lang="en-US" sz="4000" b="1" dirty="0">
+              <a:rPr lang="en-US" sz="3200" b="1" dirty="0">
                 <a:solidFill>
                   <a:srgbClr val="111111"/>
                 </a:solidFill>
@@ -13273,7 +13273,7 @@
               </a:rPr>
               <a:t>Sub-topic: Forestry, Fishing and Mining as Economic Activities of the Primary Sector</a:t>
             </a:r>
-            <a:endParaRPr lang="en-US" sz="4000" dirty="0"/>
+            <a:endParaRPr lang="en-US" sz="3200" dirty="0"/>
           </a:p>
           <a:p>
             <a:pPr algn="l" indent="0" marL="0">
@@ -13283,7 +13283,7 @@
               <a:buNone/>
             </a:pPr>
             <a:r>
-              <a:rPr lang="en-US" sz="4000" b="1" dirty="0">
+              <a:rPr lang="en-US" sz="3200" b="1" dirty="0">
                 <a:solidFill>
                   <a:srgbClr val="990011"/>
                 </a:solidFill>
@@ -13293,7 +13293,7 @@
               </a:rPr>
               <a:t>Lesson 41: Fish Resources and their Management</a:t>
             </a:r>
-            <a:endParaRPr lang="en-US" sz="4000" dirty="0"/>
+            <a:endParaRPr lang="en-US" sz="3200" dirty="0"/>
           </a:p>
         </p:txBody>
       </p:sp>

--- a/lecons/F4/53_F4_M2_L41_Fish_Resources_and_their_Management.pptx
+++ b/lecons/F4/53_F4_M2_L41_Fish_Resources_and_their_Management.pptx
@@ -56,9 +56,12 @@
     <p:sldId id="304" r:id="rId50"/>
     <p:sldId id="305" r:id="rId51"/>
     <p:sldId id="306" r:id="rId52"/>
+    <p:sldId id="307" r:id="rId53"/>
+    <p:sldId id="308" r:id="rId54"/>
+    <p:sldId id="309" r:id="rId55"/>
   </p:sldIdLst>
   <p:notesMasterIdLst>
-    <p:notesMasterId r:id="rId53"/>
+    <p:notesMasterId r:id="rId56"/>
   </p:notesMasterIdLst>
   <p:sldSz cx="12192000" cy="6858000"/>
   <p:notesSz cx="6858000" cy="12192000"/>
@@ -3104,7 +3107,7 @@
           <a:p>
             <a:r>
               <a:rPr lang="en-US" dirty="0"/>
-              <a:t>Let us copy Major Fishing Grounds. The major fishing grounds of the world are the following. On this slide we have North-West Atlantic and North-East Atlantic. Write each point on a new line, with the key term first, and explain it in your own words when we revise. When you finish, we go to the next slide.</a:t>
+              <a:t>Let us copy The Fishing Grounds. The major fishing grounds of the world are the following. On this slide we have North-West Atlantic and North-East Atlantic. Write each point on a new line, with the key term first, and explain it in your own words when we revise. When you finish, we go to the next slide.</a:t>
             </a:r>
             <a:endParaRPr lang="en-US" dirty="0"/>
           </a:p>
@@ -3192,7 +3195,7 @@
           <a:p>
             <a:r>
               <a:rPr lang="en-US" dirty="0"/>
-              <a:t>We continue with Major Fishing Grounds. On this slide we have North-West Pacific and Peru and Reasons. Write each point on a new line, with the key term first, and explain it in your own words when we revise.</a:t>
+              <a:t>We continue with The Fishing Grounds. On this slide we have North-West Pacific and Peru. Write each point on a new line, with the key term first, and explain it in your own words when we revise.</a:t>
             </a:r>
             <a:endParaRPr lang="en-US" dirty="0"/>
           </a:p>
@@ -3280,7 +3283,7 @@
           <a:p>
             <a:r>
               <a:rPr lang="en-US" dirty="0"/>
-              <a:t>Now draw this illustration in your notebook: ocean currents. Give it a title and label it clearly.</a:t>
+              <a:t>Let us copy Reasons. These areas are rich in fish for the following reasons. On this slide we have Shallow continental shelves and Cold currents. Write each point on a new line, with the key term first, and explain it in your own words when we revise.</a:t>
             </a:r>
             <a:endParaRPr lang="en-US" dirty="0"/>
           </a:p>
@@ -3368,7 +3371,7 @@
           <a:p>
             <a:r>
               <a:rPr lang="en-US" dirty="0"/>
-              <a:t>Let us copy Importance and Conservation. Fish resources are important and must be conserved. On this slide we have Importance and Conservation. Write each point on a new line, with the key term first, and explain it in your own words when we revise.</a:t>
+              <a:t>Now draw this illustration in your notebook: ocean currents. Give it a title and label it clearly.</a:t>
             </a:r>
             <a:endParaRPr lang="en-US" dirty="0"/>
           </a:p>
@@ -3544,7 +3547,7 @@
           <a:p>
             <a:r>
               <a:rPr lang="en-US" dirty="0"/>
-              <a:t>Now let us check what you have understood. Question 1: Name two major fishing grounds. Answer in your exercise book.</a:t>
+              <a:t>Let us copy Importance. Fish resources are important for the following reasons. On this slide we have Protein, Jobs and Export income. Write each point on a new line, with the key term first, and explain it in your own words when we revise.</a:t>
             </a:r>
             <a:endParaRPr lang="en-US" dirty="0"/>
           </a:p>
@@ -3632,7 +3635,7 @@
           <a:p>
             <a:r>
               <a:rPr lang="en-US" dirty="0"/>
-              <a:t>The expected answer is: the North Sea and the Grand Banks of Newfoundland. If you got it right, well done.</a:t>
+              <a:t>Let us copy Conservation. Fish stocks are protected by the following measures. On this slide we have Fishing seasons and quotas, Control of net sizes and Refrigeration. Write each point on a new line, with the key term first, and explain it in your own words when we revise. When you finish, we go to the next slide.</a:t>
             </a:r>
             <a:endParaRPr lang="en-US" dirty="0"/>
           </a:p>
@@ -3720,7 +3723,7 @@
           <a:p>
             <a:r>
               <a:rPr lang="en-US" dirty="0"/>
-              <a:t>Now let us check what you have understood. Question 2: Give two conservation measures. Answer in your exercise book.</a:t>
+              <a:t>We continue with Conservation. On this slide we have Pisciculture. Write each point on a new line, with the key term first, and explain it in your own words when we revise.</a:t>
             </a:r>
             <a:endParaRPr lang="en-US" dirty="0"/>
           </a:p>
@@ -3808,7 +3811,7 @@
           <a:p>
             <a:r>
               <a:rPr lang="en-US" dirty="0"/>
-              <a:t>The expected answer is: quotas and control of net sizes. If you got it right, well done.</a:t>
+              <a:t>Now let us check what you have understood. Question 1: Name two major fishing grounds. Answer in your exercise book.</a:t>
             </a:r>
             <a:endParaRPr lang="en-US" dirty="0"/>
           </a:p>
@@ -3896,7 +3899,7 @@
           <a:p>
             <a:r>
               <a:rPr lang="en-US" dirty="0"/>
-              <a:t>For those who need more practice, fill in the blanks in your exercise book. The answers are: number 1, plankton; number 2, pisciculture; number 3, overfishing.</a:t>
+              <a:t>The expected answer is: the North Sea and the Grand Banks of Newfoundland. If you got it right, well done.</a:t>
             </a:r>
             <a:endParaRPr lang="en-US" dirty="0"/>
           </a:p>
@@ -3984,7 +3987,7 @@
           <a:p>
             <a:r>
               <a:rPr lang="en-US" dirty="0"/>
-              <a:t>For your homework: List three places in Cameroon where people fish. We shall correct it at the beginning of our next lesson.</a:t>
+              <a:t>Now let us check what you have understood. Question 2: Give two conservation measures. Answer in your exercise book.</a:t>
             </a:r>
             <a:endParaRPr lang="en-US" dirty="0"/>
           </a:p>
@@ -4072,7 +4075,7 @@
           <a:p>
             <a:r>
               <a:rPr lang="en-US" dirty="0"/>
-              <a:t>Our next lesson will be on Lesson 42: The Management of Fish Resources in Cameroon. Thank you for your attention, and see you next time.</a:t>
+              <a:t>The expected answer is: quotas and control of net sizes. If you got it right, well done.</a:t>
             </a:r>
             <a:endParaRPr lang="en-US" dirty="0"/>
           </a:p>
@@ -4160,7 +4163,7 @@
           <a:p>
             <a:r>
               <a:rPr lang="en-US" dirty="0"/>
-              <a:t>Let us play the bilingual game. I say a word in English, and you give me the French word. Then we do the reverse.</a:t>
+              <a:t>For those who need more practice, fill in the blanks in your exercise book. The answers are: number 1, plankton; number 2, pisciculture; number 3, overfishing.</a:t>
             </a:r>
             <a:endParaRPr lang="en-US" dirty="0"/>
           </a:p>
@@ -4248,7 +4251,7 @@
           <a:p>
             <a:r>
               <a:rPr lang="en-US" dirty="0"/>
-              <a:t>I record this information in the official logbook of the class after the lesson.</a:t>
+              <a:t>For your homework: List three places in Cameroon where people fish. We shall correct it at the beginning of our next lesson.</a:t>
             </a:r>
             <a:endParaRPr lang="en-US" dirty="0"/>
           </a:p>
@@ -4336,7 +4339,7 @@
           <a:p>
             <a:r>
               <a:rPr lang="en-US" dirty="0"/>
-              <a:t>I complete the second page of the logbook: the matter taught, the evaluation, the homework and the attendance.</a:t>
+              <a:t>Our next lesson will be on Lesson 42: The Management of Fish Resources in Cameroon. Thank you for your attention, and see you next time.</a:t>
             </a:r>
             <a:endParaRPr lang="en-US" dirty="0"/>
           </a:p>
@@ -4512,7 +4515,7 @@
           <a:p>
             <a:r>
               <a:rPr lang="en-US" dirty="0"/>
-              <a:t>This slide is for me, the teacher: it gives the timing of the lesson and what to do if the projector is not available.</a:t>
+              <a:t>Let us play the bilingual game. I say a word in English, and you give me the French word. Then we do the reverse.</a:t>
             </a:r>
             <a:endParaRPr lang="en-US" dirty="0"/>
           </a:p>
@@ -4600,7 +4603,7 @@
           <a:p>
             <a:r>
               <a:rPr lang="en-US" dirty="0"/>
-              <a:t>These are the references and picture credits used to prepare this lesson.</a:t>
+              <a:t>I record this information in the official logbook of the class after the lesson.</a:t>
             </a:r>
             <a:endParaRPr lang="en-US" dirty="0"/>
           </a:p>
@@ -4624,6 +4627,270 @@
             <a:fld id="{F7021451-1387-4CA6-816F-3879F97B5CBC}" type="slidenum">
               <a:rPr lang="en-US"/>
               <a:t>51</a:t>
+            </a:fld>
+            <a:endParaRPr lang="en-US"/>
+          </a:p>
+        </p:txBody>
+      </p:sp>
+    </p:spTree>
+    <p:extLst>
+      <p:ext uri="{BB962C8B-B14F-4D97-AF65-F5344CB8AC3E}">
+        <p14:creationId xmlns:p14="http://schemas.microsoft.com/office/powerpoint/2010/main" val="1024086991"/>
+      </p:ext>
+    </p:extLst>
+  </p:cSld>
+  <p:clrMapOvr>
+    <a:masterClrMapping/>
+  </p:clrMapOvr>
+</p:notes>
+</file>
+
+<file path=ppt/notesSlides/notesSlide52.xml><?xml version="1.0" encoding="utf-8"?>
+<p:notes xmlns:a="http://schemas.openxmlformats.org/drawingml/2006/main" xmlns:r="http://schemas.openxmlformats.org/officeDocument/2006/relationships" xmlns:p="http://schemas.openxmlformats.org/presentationml/2006/main">
+  <p:cSld>
+    <p:spTree>
+      <p:nvGrpSpPr>
+        <p:cNvPr id="1" name=""/>
+        <p:cNvGrpSpPr/>
+        <p:nvPr/>
+      </p:nvGrpSpPr>
+      <p:grpSpPr>
+        <a:xfrm>
+          <a:off x="0" y="0"/>
+          <a:ext cx="0" cy="0"/>
+          <a:chOff x="0" y="0"/>
+          <a:chExt cx="0" cy="0"/>
+        </a:xfrm>
+      </p:grpSpPr>
+      <p:sp>
+        <p:nvSpPr>
+          <p:cNvPr id="2" name="Slide Image Placeholder 1"/>
+          <p:cNvSpPr>
+            <a:spLocks noGrp="1" noRot="1" noChangeAspect="1"/>
+          </p:cNvSpPr>
+          <p:nvPr>
+            <p:ph type="sldImg"/>
+          </p:nvPr>
+        </p:nvSpPr>
+        <p:spPr/>
+      </p:sp>
+      <p:sp>
+        <p:nvSpPr>
+          <p:cNvPr id="3" name="Notes Placeholder 2"/>
+          <p:cNvSpPr>
+            <a:spLocks noGrp="1"/>
+          </p:cNvSpPr>
+          <p:nvPr>
+            <p:ph type="body" idx="1"/>
+          </p:nvPr>
+        </p:nvSpPr>
+        <p:spPr/>
+        <p:txBody>
+          <a:bodyPr/>
+          <a:lstStyle/>
+          <a:p>
+            <a:r>
+              <a:rPr lang="en-US" dirty="0"/>
+              <a:t>I complete the second page of the logbook: the matter taught, the evaluation, the homework and the attendance.</a:t>
+            </a:r>
+            <a:endParaRPr lang="en-US" dirty="0"/>
+          </a:p>
+        </p:txBody>
+      </p:sp>
+      <p:sp>
+        <p:nvSpPr>
+          <p:cNvPr id="4" name="Slide Number Placeholder 3"/>
+          <p:cNvSpPr>
+            <a:spLocks noGrp="1"/>
+          </p:cNvSpPr>
+          <p:nvPr>
+            <p:ph type="sldNum" sz="quarter" idx="10"/>
+          </p:nvPr>
+        </p:nvSpPr>
+        <p:spPr/>
+        <p:txBody>
+          <a:bodyPr/>
+          <a:lstStyle/>
+          <a:p>
+            <a:fld id="{F7021451-1387-4CA6-816F-3879F97B5CBC}" type="slidenum">
+              <a:rPr lang="en-US"/>
+              <a:t>52</a:t>
+            </a:fld>
+            <a:endParaRPr lang="en-US"/>
+          </a:p>
+        </p:txBody>
+      </p:sp>
+    </p:spTree>
+    <p:extLst>
+      <p:ext uri="{BB962C8B-B14F-4D97-AF65-F5344CB8AC3E}">
+        <p14:creationId xmlns:p14="http://schemas.microsoft.com/office/powerpoint/2010/main" val="1024086991"/>
+      </p:ext>
+    </p:extLst>
+  </p:cSld>
+  <p:clrMapOvr>
+    <a:masterClrMapping/>
+  </p:clrMapOvr>
+</p:notes>
+</file>
+
+<file path=ppt/notesSlides/notesSlide53.xml><?xml version="1.0" encoding="utf-8"?>
+<p:notes xmlns:a="http://schemas.openxmlformats.org/drawingml/2006/main" xmlns:r="http://schemas.openxmlformats.org/officeDocument/2006/relationships" xmlns:p="http://schemas.openxmlformats.org/presentationml/2006/main">
+  <p:cSld>
+    <p:spTree>
+      <p:nvGrpSpPr>
+        <p:cNvPr id="1" name=""/>
+        <p:cNvGrpSpPr/>
+        <p:nvPr/>
+      </p:nvGrpSpPr>
+      <p:grpSpPr>
+        <a:xfrm>
+          <a:off x="0" y="0"/>
+          <a:ext cx="0" cy="0"/>
+          <a:chOff x="0" y="0"/>
+          <a:chExt cx="0" cy="0"/>
+        </a:xfrm>
+      </p:grpSpPr>
+      <p:sp>
+        <p:nvSpPr>
+          <p:cNvPr id="2" name="Slide Image Placeholder 1"/>
+          <p:cNvSpPr>
+            <a:spLocks noGrp="1" noRot="1" noChangeAspect="1"/>
+          </p:cNvSpPr>
+          <p:nvPr>
+            <p:ph type="sldImg"/>
+          </p:nvPr>
+        </p:nvSpPr>
+        <p:spPr/>
+      </p:sp>
+      <p:sp>
+        <p:nvSpPr>
+          <p:cNvPr id="3" name="Notes Placeholder 2"/>
+          <p:cNvSpPr>
+            <a:spLocks noGrp="1"/>
+          </p:cNvSpPr>
+          <p:nvPr>
+            <p:ph type="body" idx="1"/>
+          </p:nvPr>
+        </p:nvSpPr>
+        <p:spPr/>
+        <p:txBody>
+          <a:bodyPr/>
+          <a:lstStyle/>
+          <a:p>
+            <a:r>
+              <a:rPr lang="en-US" dirty="0"/>
+              <a:t>This slide is for me, the teacher: it gives the timing of the lesson and what to do if the projector is not available.</a:t>
+            </a:r>
+            <a:endParaRPr lang="en-US" dirty="0"/>
+          </a:p>
+        </p:txBody>
+      </p:sp>
+      <p:sp>
+        <p:nvSpPr>
+          <p:cNvPr id="4" name="Slide Number Placeholder 3"/>
+          <p:cNvSpPr>
+            <a:spLocks noGrp="1"/>
+          </p:cNvSpPr>
+          <p:nvPr>
+            <p:ph type="sldNum" sz="quarter" idx="10"/>
+          </p:nvPr>
+        </p:nvSpPr>
+        <p:spPr/>
+        <p:txBody>
+          <a:bodyPr/>
+          <a:lstStyle/>
+          <a:p>
+            <a:fld id="{F7021451-1387-4CA6-816F-3879F97B5CBC}" type="slidenum">
+              <a:rPr lang="en-US"/>
+              <a:t>53</a:t>
+            </a:fld>
+            <a:endParaRPr lang="en-US"/>
+          </a:p>
+        </p:txBody>
+      </p:sp>
+    </p:spTree>
+    <p:extLst>
+      <p:ext uri="{BB962C8B-B14F-4D97-AF65-F5344CB8AC3E}">
+        <p14:creationId xmlns:p14="http://schemas.microsoft.com/office/powerpoint/2010/main" val="1024086991"/>
+      </p:ext>
+    </p:extLst>
+  </p:cSld>
+  <p:clrMapOvr>
+    <a:masterClrMapping/>
+  </p:clrMapOvr>
+</p:notes>
+</file>
+
+<file path=ppt/notesSlides/notesSlide54.xml><?xml version="1.0" encoding="utf-8"?>
+<p:notes xmlns:a="http://schemas.openxmlformats.org/drawingml/2006/main" xmlns:r="http://schemas.openxmlformats.org/officeDocument/2006/relationships" xmlns:p="http://schemas.openxmlformats.org/presentationml/2006/main">
+  <p:cSld>
+    <p:spTree>
+      <p:nvGrpSpPr>
+        <p:cNvPr id="1" name=""/>
+        <p:cNvGrpSpPr/>
+        <p:nvPr/>
+      </p:nvGrpSpPr>
+      <p:grpSpPr>
+        <a:xfrm>
+          <a:off x="0" y="0"/>
+          <a:ext cx="0" cy="0"/>
+          <a:chOff x="0" y="0"/>
+          <a:chExt cx="0" cy="0"/>
+        </a:xfrm>
+      </p:grpSpPr>
+      <p:sp>
+        <p:nvSpPr>
+          <p:cNvPr id="2" name="Slide Image Placeholder 1"/>
+          <p:cNvSpPr>
+            <a:spLocks noGrp="1" noRot="1" noChangeAspect="1"/>
+          </p:cNvSpPr>
+          <p:nvPr>
+            <p:ph type="sldImg"/>
+          </p:nvPr>
+        </p:nvSpPr>
+        <p:spPr/>
+      </p:sp>
+      <p:sp>
+        <p:nvSpPr>
+          <p:cNvPr id="3" name="Notes Placeholder 2"/>
+          <p:cNvSpPr>
+            <a:spLocks noGrp="1"/>
+          </p:cNvSpPr>
+          <p:nvPr>
+            <p:ph type="body" idx="1"/>
+          </p:nvPr>
+        </p:nvSpPr>
+        <p:spPr/>
+        <p:txBody>
+          <a:bodyPr/>
+          <a:lstStyle/>
+          <a:p>
+            <a:r>
+              <a:rPr lang="en-US" dirty="0"/>
+              <a:t>These are the references and picture credits used to prepare this lesson.</a:t>
+            </a:r>
+            <a:endParaRPr lang="en-US" dirty="0"/>
+          </a:p>
+        </p:txBody>
+      </p:sp>
+      <p:sp>
+        <p:nvSpPr>
+          <p:cNvPr id="4" name="Slide Number Placeholder 3"/>
+          <p:cNvSpPr>
+            <a:spLocks noGrp="1"/>
+          </p:cNvSpPr>
+          <p:nvPr>
+            <p:ph type="sldNum" sz="quarter" idx="10"/>
+          </p:nvPr>
+        </p:nvSpPr>
+        <p:spPr/>
+        <p:txBody>
+          <a:bodyPr/>
+          <a:lstStyle/>
+          <a:p>
+            <a:fld id="{F7021451-1387-4CA6-816F-3879F97B5CBC}" type="slidenum">
+              <a:rPr lang="en-US"/>
+              <a:t>54</a:t>
             </a:fld>
             <a:endParaRPr lang="en-US"/>
           </a:p>
@@ -13719,7 +13986,7 @@
         <p:spPr>
           <a:xfrm>
             <a:off x="0" y="658368"/>
-            <a:ext cx="3840480" cy="5833872"/>
+            <a:ext cx="2468880" cy="5833872"/>
           </a:xfrm>
           <a:prstGeom prst="rect">
             <a:avLst/>
@@ -13734,8 +14001,8 @@
         </p:nvSpPr>
         <p:spPr>
           <a:xfrm>
-            <a:off x="4069080" y="1005840"/>
-            <a:ext cx="7802575" cy="731520"/>
+            <a:off x="2697480" y="1005840"/>
+            <a:ext cx="9174175" cy="731520"/>
           </a:xfrm>
           <a:prstGeom prst="rect">
             <a:avLst/>
@@ -13775,8 +14042,47 @@
         </p:nvSpPr>
         <p:spPr>
           <a:xfrm>
-            <a:off x="4069080" y="1783080"/>
-            <a:ext cx="7802575" cy="4663440"/>
+            <a:off x="2697480" y="1737360"/>
+            <a:ext cx="9174175" cy="457200"/>
+          </a:xfrm>
+          <a:prstGeom prst="rect">
+            <a:avLst/>
+          </a:prstGeom>
+          <a:noFill/>
+          <a:ln/>
+        </p:spPr>
+        <p:txBody>
+          <a:bodyPr wrap="square" lIns="0" tIns="0" rIns="0" bIns="0" rtlCol="0" anchor="ctr"/>
+          <a:lstStyle/>
+          <a:p>
+            <a:pPr algn="l" indent="0" marL="0">
+              <a:buNone/>
+            </a:pPr>
+            <a:r>
+              <a:rPr lang="en-US" sz="3200" b="1" dirty="0">
+                <a:solidFill>
+                  <a:srgbClr val="990011"/>
+                </a:solidFill>
+                <a:latin typeface="Times New Roman" pitchFamily="34" charset="0"/>
+                <a:ea typeface="Times New Roman" pitchFamily="34" charset="-122"/>
+                <a:cs typeface="Times New Roman" pitchFamily="34" charset="-120"/>
+              </a:rPr>
+              <a:t>A) The Fishing Grounds</a:t>
+            </a:r>
+            <a:endParaRPr lang="en-US" sz="3200" dirty="0"/>
+          </a:p>
+        </p:txBody>
+      </p:sp>
+      <p:sp>
+        <p:nvSpPr>
+          <p:cNvPr id="6" name="Text 3"/>
+          <p:cNvSpPr/>
+          <p:nvPr/>
+        </p:nvSpPr>
+        <p:spPr>
+          <a:xfrm>
+            <a:off x="2697480" y="2240280"/>
+            <a:ext cx="9174175" cy="4206240"/>
           </a:xfrm>
           <a:prstGeom prst="rect">
             <a:avLst/>
@@ -14054,7 +14360,7 @@
                 <a:ea typeface="Times New Roman" pitchFamily="34" charset="-122"/>
                 <a:cs typeface="Times New Roman" pitchFamily="34" charset="-120"/>
               </a:rPr>
-              <a:t>1. Major Fishing Grounds (continued)</a:t>
+              <a:t>1. Major Fishing Grounds</a:t>
             </a:r>
             <a:endParaRPr lang="en-US" sz="3600" dirty="0"/>
           </a:p>
@@ -14068,8 +14374,47 @@
         </p:nvSpPr>
         <p:spPr>
           <a:xfrm>
-            <a:off x="5349240" y="1783080"/>
-            <a:ext cx="6522415" cy="4663440"/>
+            <a:off x="5349240" y="1737360"/>
+            <a:ext cx="6522415" cy="457200"/>
+          </a:xfrm>
+          <a:prstGeom prst="rect">
+            <a:avLst/>
+          </a:prstGeom>
+          <a:noFill/>
+          <a:ln/>
+        </p:spPr>
+        <p:txBody>
+          <a:bodyPr wrap="square" lIns="0" tIns="0" rIns="0" bIns="0" rtlCol="0" anchor="ctr"/>
+          <a:lstStyle/>
+          <a:p>
+            <a:pPr algn="l" indent="0" marL="0">
+              <a:buNone/>
+            </a:pPr>
+            <a:r>
+              <a:rPr lang="en-US" sz="3000" b="1" dirty="0">
+                <a:solidFill>
+                  <a:srgbClr val="990011"/>
+                </a:solidFill>
+                <a:latin typeface="Times New Roman" pitchFamily="34" charset="0"/>
+                <a:ea typeface="Times New Roman" pitchFamily="34" charset="-122"/>
+                <a:cs typeface="Times New Roman" pitchFamily="34" charset="-120"/>
+              </a:rPr>
+              <a:t>A) The Fishing Grounds (continued)</a:t>
+            </a:r>
+            <a:endParaRPr lang="en-US" sz="3000" dirty="0"/>
+          </a:p>
+        </p:txBody>
+      </p:sp>
+      <p:sp>
+        <p:nvSpPr>
+          <p:cNvPr id="6" name="Text 3"/>
+          <p:cNvSpPr/>
+          <p:nvPr/>
+        </p:nvSpPr>
+        <p:spPr>
+          <a:xfrm>
+            <a:off x="5349240" y="2240280"/>
+            <a:ext cx="6522415" cy="4206240"/>
           </a:xfrm>
           <a:prstGeom prst="rect">
             <a:avLst/>
@@ -14114,43 +14459,6 @@
                 <a:cs typeface="Times New Roman" pitchFamily="34" charset="-120"/>
               </a:rPr>
               <a:t>They include the seas around Japan and the Peruvian coast.</a:t>
-            </a:r>
-            <a:endParaRPr lang="en-US" sz="4000" dirty="0"/>
-          </a:p>
-          <a:p>
-            <a:pPr algn="l" indent="0" marL="0">
-              <a:spcAft>
-                <a:spcPts val="800"/>
-              </a:spcAft>
-              <a:buNone/>
-            </a:pPr>
-            <a:r>
-              <a:rPr lang="en-US" sz="4000" b="1" dirty="0">
-                <a:solidFill>
-                  <a:srgbClr val="111111"/>
-                </a:solidFill>
-                <a:latin typeface="Times New Roman" pitchFamily="34" charset="0"/>
-                <a:ea typeface="Times New Roman" pitchFamily="34" charset="-122"/>
-                <a:cs typeface="Times New Roman" pitchFamily="34" charset="-120"/>
-              </a:rPr>
-              <a:t>Reasons: </a:t>
-            </a:r>
-            <a:pPr algn="l" indent="0" marL="0">
-              <a:spcAft>
-                <a:spcPts val="800"/>
-              </a:spcAft>
-              <a:buNone/>
-            </a:pPr>
-            <a:r>
-              <a:rPr lang="en-US" sz="4000" dirty="0">
-                <a:solidFill>
-                  <a:srgbClr val="111111"/>
-                </a:solidFill>
-                <a:latin typeface="Times New Roman" pitchFamily="34" charset="0"/>
-                <a:ea typeface="Times New Roman" pitchFamily="34" charset="-122"/>
-                <a:cs typeface="Times New Roman" pitchFamily="34" charset="-120"/>
-              </a:rPr>
-              <a:t>Shallow continental shelves and cold currents bring much plankton.</a:t>
             </a:r>
             <a:endParaRPr lang="en-US" sz="4000" dirty="0"/>
           </a:p>
@@ -14268,48 +14576,9 @@
           </a:p>
         </p:txBody>
       </p:sp>
-      <p:sp>
-        <p:nvSpPr>
-          <p:cNvPr id="3" name="Text 1"/>
-          <p:cNvSpPr/>
-          <p:nvPr/>
-        </p:nvSpPr>
-        <p:spPr>
-          <a:xfrm>
-            <a:off x="457200" y="1005840"/>
-            <a:ext cx="11277295" cy="731520"/>
-          </a:xfrm>
-          <a:prstGeom prst="rect">
-            <a:avLst/>
-          </a:prstGeom>
-          <a:noFill/>
-          <a:ln/>
-        </p:spPr>
-        <p:txBody>
-          <a:bodyPr wrap="square" lIns="0" tIns="0" rIns="0" bIns="0" rtlCol="0" anchor="ctr"/>
-          <a:lstStyle/>
-          <a:p>
-            <a:pPr algn="ctr" indent="0" marL="0">
-              <a:buNone/>
-            </a:pPr>
-            <a:r>
-              <a:rPr lang="en-US" sz="3600" b="1" dirty="0">
-                <a:solidFill>
-                  <a:srgbClr val="990011"/>
-                </a:solidFill>
-                <a:latin typeface="Times New Roman" pitchFamily="34" charset="0"/>
-                <a:ea typeface="Times New Roman" pitchFamily="34" charset="-122"/>
-                <a:cs typeface="Times New Roman" pitchFamily="34" charset="-120"/>
-              </a:rPr>
-              <a:t>1. Major Fishing Grounds</a:t>
-            </a:r>
-            <a:endParaRPr lang="en-US" sz="3600" dirty="0"/>
-          </a:p>
-        </p:txBody>
-      </p:sp>
       <p:pic>
         <p:nvPicPr>
-          <p:cNvPr id="4" name="Image 0" descr="/home/claude/f4/img/v2/ocean_currents_big.png">    </p:cNvPr>
+          <p:cNvPr id="3" name="Image 0" descr="/home/claude/f4/img/minesec_sheet.png">    </p:cNvPr>
           <p:cNvPicPr>
             <a:picLocks noChangeAspect="1"/>
           </p:cNvPicPr>
@@ -14323,8 +14592,8 @@
         </p:blipFill>
         <p:spPr>
           <a:xfrm>
-            <a:off x="1825600" y="1783080"/>
-            <a:ext cx="8540496" cy="4270248"/>
+            <a:off x="0" y="658368"/>
+            <a:ext cx="2468880" cy="5833872"/>
           </a:xfrm>
           <a:prstGeom prst="rect">
             <a:avLst/>
@@ -14333,14 +14602,14 @@
       </p:pic>
       <p:sp>
         <p:nvSpPr>
-          <p:cNvPr id="5" name="Text 2"/>
+          <p:cNvPr id="4" name="Text 1"/>
           <p:cNvSpPr/>
           <p:nvPr/>
         </p:nvSpPr>
         <p:spPr>
           <a:xfrm>
-            <a:off x="457200" y="6089904"/>
-            <a:ext cx="11277295" cy="347472"/>
+            <a:off x="2697480" y="1005840"/>
+            <a:ext cx="9174175" cy="731520"/>
           </a:xfrm>
           <a:prstGeom prst="rect">
             <a:avLst/>
@@ -14349,24 +14618,181 @@
           <a:ln/>
         </p:spPr>
         <p:txBody>
-          <a:bodyPr wrap="square" lIns="0" tIns="0" rIns="0" bIns="0" rtlCol="0" anchor="ctr"/>
+          <a:bodyPr wrap="square" lIns="0" tIns="0" rIns="0" bIns="0" rtlCol="0" anchor="ctr">
+            <a:normAutofit/>
+          </a:bodyPr>
           <a:lstStyle/>
           <a:p>
             <a:pPr algn="ctr" indent="0" marL="0">
               <a:buNone/>
             </a:pPr>
             <a:r>
-              <a:rPr lang="en-US" sz="1800" i="1" dirty="0">
-                <a:solidFill>
-                  <a:srgbClr val="555555"/>
+              <a:rPr lang="en-US" sz="3600" b="1" dirty="0">
+                <a:solidFill>
+                  <a:srgbClr val="990011"/>
                 </a:solidFill>
                 <a:latin typeface="Times New Roman" pitchFamily="34" charset="0"/>
                 <a:ea typeface="Times New Roman" pitchFamily="34" charset="-122"/>
                 <a:cs typeface="Times New Roman" pitchFamily="34" charset="-120"/>
               </a:rPr>
-              <a:t>Illustration: ocean currents</a:t>
-            </a:r>
-            <a:endParaRPr lang="en-US" sz="1800" dirty="0"/>
+              <a:t>1. Major Fishing Grounds</a:t>
+            </a:r>
+            <a:endParaRPr lang="en-US" sz="3600" dirty="0"/>
+          </a:p>
+        </p:txBody>
+      </p:sp>
+      <p:sp>
+        <p:nvSpPr>
+          <p:cNvPr id="5" name="Text 2"/>
+          <p:cNvSpPr/>
+          <p:nvPr/>
+        </p:nvSpPr>
+        <p:spPr>
+          <a:xfrm>
+            <a:off x="2697480" y="1737360"/>
+            <a:ext cx="9174175" cy="457200"/>
+          </a:xfrm>
+          <a:prstGeom prst="rect">
+            <a:avLst/>
+          </a:prstGeom>
+          <a:noFill/>
+          <a:ln/>
+        </p:spPr>
+        <p:txBody>
+          <a:bodyPr wrap="square" lIns="0" tIns="0" rIns="0" bIns="0" rtlCol="0" anchor="ctr"/>
+          <a:lstStyle/>
+          <a:p>
+            <a:pPr algn="l" indent="0" marL="0">
+              <a:buNone/>
+            </a:pPr>
+            <a:r>
+              <a:rPr lang="en-US" sz="3200" b="1" dirty="0">
+                <a:solidFill>
+                  <a:srgbClr val="990011"/>
+                </a:solidFill>
+                <a:latin typeface="Times New Roman" pitchFamily="34" charset="0"/>
+                <a:ea typeface="Times New Roman" pitchFamily="34" charset="-122"/>
+                <a:cs typeface="Times New Roman" pitchFamily="34" charset="-120"/>
+              </a:rPr>
+              <a:t>B) Reasons</a:t>
+            </a:r>
+            <a:endParaRPr lang="en-US" sz="3200" dirty="0"/>
+          </a:p>
+        </p:txBody>
+      </p:sp>
+      <p:sp>
+        <p:nvSpPr>
+          <p:cNvPr id="6" name="Text 3"/>
+          <p:cNvSpPr/>
+          <p:nvPr/>
+        </p:nvSpPr>
+        <p:spPr>
+          <a:xfrm>
+            <a:off x="2697480" y="2240280"/>
+            <a:ext cx="9174175" cy="4206240"/>
+          </a:xfrm>
+          <a:prstGeom prst="rect">
+            <a:avLst/>
+          </a:prstGeom>
+          <a:noFill/>
+          <a:ln/>
+        </p:spPr>
+        <p:txBody>
+          <a:bodyPr wrap="square" lIns="0" tIns="0" rIns="0" bIns="0" rtlCol="0" anchor="t"/>
+          <a:lstStyle/>
+          <a:p>
+            <a:pPr algn="l" indent="0" marL="0">
+              <a:spcAft>
+                <a:spcPts val="800"/>
+              </a:spcAft>
+              <a:buNone/>
+            </a:pPr>
+            <a:r>
+              <a:rPr lang="en-US" sz="4000" i="1" dirty="0">
+                <a:solidFill>
+                  <a:srgbClr val="111111"/>
+                </a:solidFill>
+                <a:latin typeface="Times New Roman" pitchFamily="34" charset="0"/>
+                <a:ea typeface="Times New Roman" pitchFamily="34" charset="-122"/>
+                <a:cs typeface="Times New Roman" pitchFamily="34" charset="-120"/>
+              </a:rPr>
+              <a:t>These areas are rich in fish for the following reasons:</a:t>
+            </a:r>
+            <a:endParaRPr lang="en-US" sz="4000" dirty="0"/>
+          </a:p>
+          <a:p>
+            <a:pPr algn="l" indent="0" marL="0">
+              <a:spcAft>
+                <a:spcPts val="800"/>
+              </a:spcAft>
+              <a:buNone/>
+            </a:pPr>
+            <a:r>
+              <a:rPr lang="en-US" sz="4000" b="1" dirty="0">
+                <a:solidFill>
+                  <a:srgbClr val="111111"/>
+                </a:solidFill>
+                <a:latin typeface="Times New Roman" pitchFamily="34" charset="0"/>
+                <a:ea typeface="Times New Roman" pitchFamily="34" charset="-122"/>
+                <a:cs typeface="Times New Roman" pitchFamily="34" charset="-120"/>
+              </a:rPr>
+              <a:t>Shallow continental shelves: </a:t>
+            </a:r>
+            <a:pPr algn="l" indent="0" marL="0">
+              <a:spcAft>
+                <a:spcPts val="800"/>
+              </a:spcAft>
+              <a:buNone/>
+            </a:pPr>
+            <a:r>
+              <a:rPr lang="en-US" sz="4000" dirty="0">
+                <a:solidFill>
+                  <a:srgbClr val="111111"/>
+                </a:solidFill>
+                <a:latin typeface="Times New Roman" pitchFamily="34" charset="0"/>
+                <a:ea typeface="Times New Roman" pitchFamily="34" charset="-122"/>
+                <a:cs typeface="Times New Roman" pitchFamily="34" charset="-120"/>
+              </a:rPr>
+              <a:t>Light reaches the sea bed and plankton grows.</a:t>
+            </a:r>
+            <a:endParaRPr lang="en-US" sz="4000" dirty="0"/>
+          </a:p>
+          <a:p>
+            <a:pPr algn="l" indent="0" marL="0">
+              <a:spcAft>
+                <a:spcPts val="800"/>
+              </a:spcAft>
+              <a:buNone/>
+            </a:pPr>
+            <a:r>
+              <a:rPr lang="en-US" sz="4000" b="1" dirty="0">
+                <a:solidFill>
+                  <a:srgbClr val="111111"/>
+                </a:solidFill>
+                <a:latin typeface="Times New Roman" pitchFamily="34" charset="0"/>
+                <a:ea typeface="Times New Roman" pitchFamily="34" charset="-122"/>
+                <a:cs typeface="Times New Roman" pitchFamily="34" charset="-120"/>
+              </a:rPr>
+              <a:t>Cold currents: </a:t>
+            </a:r>
+            <a:pPr algn="l" indent="0" marL="0">
+              <a:spcAft>
+                <a:spcPts val="800"/>
+              </a:spcAft>
+              <a:buNone/>
+            </a:pPr>
+            <a:r>
+              <a:rPr lang="en-US" sz="4000" dirty="0">
+                <a:solidFill>
+                  <a:srgbClr val="111111"/>
+                </a:solidFill>
+                <a:latin typeface="Times New Roman" pitchFamily="34" charset="0"/>
+                <a:ea typeface="Times New Roman" pitchFamily="34" charset="-122"/>
+                <a:cs typeface="Times New Roman" pitchFamily="34" charset="-120"/>
+              </a:rPr>
+              <a:t>They bring much plankton, the food of fish.</a:t>
+            </a:r>
+            <a:endParaRPr lang="en-US" sz="4000" dirty="0"/>
           </a:p>
         </p:txBody>
       </p:sp>
@@ -14482,9 +14908,48 @@
           </a:p>
         </p:txBody>
       </p:sp>
+      <p:sp>
+        <p:nvSpPr>
+          <p:cNvPr id="3" name="Text 1"/>
+          <p:cNvSpPr/>
+          <p:nvPr/>
+        </p:nvSpPr>
+        <p:spPr>
+          <a:xfrm>
+            <a:off x="457200" y="1005840"/>
+            <a:ext cx="11277295" cy="731520"/>
+          </a:xfrm>
+          <a:prstGeom prst="rect">
+            <a:avLst/>
+          </a:prstGeom>
+          <a:noFill/>
+          <a:ln/>
+        </p:spPr>
+        <p:txBody>
+          <a:bodyPr wrap="square" lIns="0" tIns="0" rIns="0" bIns="0" rtlCol="0" anchor="ctr"/>
+          <a:lstStyle/>
+          <a:p>
+            <a:pPr algn="ctr" indent="0" marL="0">
+              <a:buNone/>
+            </a:pPr>
+            <a:r>
+              <a:rPr lang="en-US" sz="3600" b="1" dirty="0">
+                <a:solidFill>
+                  <a:srgbClr val="990011"/>
+                </a:solidFill>
+                <a:latin typeface="Times New Roman" pitchFamily="34" charset="0"/>
+                <a:ea typeface="Times New Roman" pitchFamily="34" charset="-122"/>
+                <a:cs typeface="Times New Roman" pitchFamily="34" charset="-120"/>
+              </a:rPr>
+              <a:t>1. Major Fishing Grounds</a:t>
+            </a:r>
+            <a:endParaRPr lang="en-US" sz="3600" dirty="0"/>
+          </a:p>
+        </p:txBody>
+      </p:sp>
       <p:pic>
         <p:nvPicPr>
-          <p:cNvPr id="3" name="Image 0" descr="/home/claude/f4/img/minesec_sheet.png">    </p:cNvPr>
+          <p:cNvPr id="4" name="Image 0" descr="/home/claude/f4/img/v2/ocean_currents_big.png">    </p:cNvPr>
           <p:cNvPicPr>
             <a:picLocks noChangeAspect="1"/>
           </p:cNvPicPr>
@@ -14498,8 +14963,8 @@
         </p:blipFill>
         <p:spPr>
           <a:xfrm>
-            <a:off x="0" y="658368"/>
-            <a:ext cx="1463040" cy="5833872"/>
+            <a:off x="1825600" y="1783080"/>
+            <a:ext cx="8540496" cy="4270248"/>
           </a:xfrm>
           <a:prstGeom prst="rect">
             <a:avLst/>
@@ -14508,14 +14973,14 @@
       </p:pic>
       <p:sp>
         <p:nvSpPr>
-          <p:cNvPr id="4" name="Text 1"/>
+          <p:cNvPr id="5" name="Text 2"/>
           <p:cNvSpPr/>
           <p:nvPr/>
         </p:nvSpPr>
         <p:spPr>
           <a:xfrm>
-            <a:off x="1691640" y="1005840"/>
-            <a:ext cx="10180015" cy="731520"/>
+            <a:off x="457200" y="6089904"/>
+            <a:ext cx="11277295" cy="347472"/>
           </a:xfrm>
           <a:prstGeom prst="rect">
             <a:avLst/>
@@ -14524,142 +14989,24 @@
           <a:ln/>
         </p:spPr>
         <p:txBody>
-          <a:bodyPr wrap="square" lIns="0" tIns="0" rIns="0" bIns="0" rtlCol="0" anchor="ctr">
-            <a:normAutofit/>
-          </a:bodyPr>
+          <a:bodyPr wrap="square" lIns="0" tIns="0" rIns="0" bIns="0" rtlCol="0" anchor="ctr"/>
           <a:lstStyle/>
           <a:p>
             <a:pPr algn="ctr" indent="0" marL="0">
               <a:buNone/>
             </a:pPr>
             <a:r>
-              <a:rPr lang="en-US" sz="3600" b="1" dirty="0">
-                <a:solidFill>
-                  <a:srgbClr val="990011"/>
+              <a:rPr lang="en-US" sz="1800" i="1" dirty="0">
+                <a:solidFill>
+                  <a:srgbClr val="555555"/>
                 </a:solidFill>
                 <a:latin typeface="Times New Roman" pitchFamily="34" charset="0"/>
                 <a:ea typeface="Times New Roman" pitchFamily="34" charset="-122"/>
                 <a:cs typeface="Times New Roman" pitchFamily="34" charset="-120"/>
               </a:rPr>
-              <a:t>2. Importance and Conservation</a:t>
-            </a:r>
-            <a:endParaRPr lang="en-US" sz="3600" dirty="0"/>
-          </a:p>
-        </p:txBody>
-      </p:sp>
-      <p:sp>
-        <p:nvSpPr>
-          <p:cNvPr id="5" name="Text 2"/>
-          <p:cNvSpPr/>
-          <p:nvPr/>
-        </p:nvSpPr>
-        <p:spPr>
-          <a:xfrm>
-            <a:off x="1691640" y="1783080"/>
-            <a:ext cx="10180015" cy="4663440"/>
-          </a:xfrm>
-          <a:prstGeom prst="rect">
-            <a:avLst/>
-          </a:prstGeom>
-          <a:noFill/>
-          <a:ln/>
-        </p:spPr>
-        <p:txBody>
-          <a:bodyPr wrap="square" lIns="0" tIns="0" rIns="0" bIns="0" rtlCol="0" anchor="t"/>
-          <a:lstStyle/>
-          <a:p>
-            <a:pPr algn="l" indent="0" marL="0">
-              <a:spcAft>
-                <a:spcPts val="800"/>
-              </a:spcAft>
-              <a:buNone/>
-            </a:pPr>
-            <a:r>
-              <a:rPr lang="en-US" sz="4000" i="1" dirty="0">
-                <a:solidFill>
-                  <a:srgbClr val="111111"/>
-                </a:solidFill>
-                <a:latin typeface="Times New Roman" pitchFamily="34" charset="0"/>
-                <a:ea typeface="Times New Roman" pitchFamily="34" charset="-122"/>
-                <a:cs typeface="Times New Roman" pitchFamily="34" charset="-120"/>
-              </a:rPr>
-              <a:t>Fish resources are important and must be conserved:</a:t>
-            </a:r>
-            <a:endParaRPr lang="en-US" sz="4000" dirty="0"/>
-          </a:p>
-          <a:p>
-            <a:pPr algn="l" indent="0" marL="0">
-              <a:spcAft>
-                <a:spcPts val="800"/>
-              </a:spcAft>
-              <a:buNone/>
-            </a:pPr>
-            <a:r>
-              <a:rPr lang="en-US" sz="4000" b="1" dirty="0">
-                <a:solidFill>
-                  <a:srgbClr val="111111"/>
-                </a:solidFill>
-                <a:latin typeface="Times New Roman" pitchFamily="34" charset="0"/>
-                <a:ea typeface="Times New Roman" pitchFamily="34" charset="-122"/>
-                <a:cs typeface="Times New Roman" pitchFamily="34" charset="-120"/>
-              </a:rPr>
-              <a:t>Importance: </a:t>
-            </a:r>
-            <a:pPr algn="l" indent="0" marL="0">
-              <a:spcAft>
-                <a:spcPts val="800"/>
-              </a:spcAft>
-              <a:buNone/>
-            </a:pPr>
-            <a:r>
-              <a:rPr lang="en-US" sz="4000" dirty="0">
-                <a:solidFill>
-                  <a:srgbClr val="111111"/>
-                </a:solidFill>
-                <a:latin typeface="Times New Roman" pitchFamily="34" charset="0"/>
-                <a:ea typeface="Times New Roman" pitchFamily="34" charset="-122"/>
-                <a:cs typeface="Times New Roman" pitchFamily="34" charset="-120"/>
-              </a:rPr>
-              <a:t>Fish is a cheap source of protein and gives jobs and export income.</a:t>
-            </a:r>
-            <a:endParaRPr lang="en-US" sz="4000" dirty="0"/>
-          </a:p>
-          <a:p>
-            <a:pPr algn="l" indent="0" marL="0">
-              <a:spcAft>
-                <a:spcPts val="800"/>
-              </a:spcAft>
-              <a:buNone/>
-            </a:pPr>
-            <a:r>
-              <a:rPr lang="en-US" sz="4000" b="1" dirty="0">
-                <a:solidFill>
-                  <a:srgbClr val="111111"/>
-                </a:solidFill>
-                <a:latin typeface="Times New Roman" pitchFamily="34" charset="0"/>
-                <a:ea typeface="Times New Roman" pitchFamily="34" charset="-122"/>
-                <a:cs typeface="Times New Roman" pitchFamily="34" charset="-120"/>
-              </a:rPr>
-              <a:t>Conservation: </a:t>
-            </a:r>
-            <a:pPr algn="l" indent="0" marL="0">
-              <a:spcAft>
-                <a:spcPts val="800"/>
-              </a:spcAft>
-              <a:buNone/>
-            </a:pPr>
-            <a:r>
-              <a:rPr lang="en-US" sz="4000" dirty="0">
-                <a:solidFill>
-                  <a:srgbClr val="111111"/>
-                </a:solidFill>
-                <a:latin typeface="Times New Roman" pitchFamily="34" charset="0"/>
-                <a:ea typeface="Times New Roman" pitchFamily="34" charset="-122"/>
-                <a:cs typeface="Times New Roman" pitchFamily="34" charset="-120"/>
-              </a:rPr>
-              <a:t>Fishing seasons, quotas, control of net sizes, refrigeration and pisciculture protect fish stocks.</a:t>
-            </a:r>
-            <a:endParaRPr lang="en-US" sz="4000" dirty="0"/>
+              <a:t>Illustration: ocean currents</a:t>
+            </a:r>
+            <a:endParaRPr lang="en-US" sz="1800" dirty="0"/>
           </a:p>
         </p:txBody>
       </p:sp>
@@ -15008,7 +15355,7 @@
                 <a:ea typeface="Calibri" pitchFamily="34" charset="-122"/>
                 <a:cs typeface="Calibri" pitchFamily="34" charset="-120"/>
               </a:rPr>
-              <a:t>FORMATIVE EVALUATION</a:t>
+              <a:t>BOARD SUMMARY</a:t>
             </a:r>
             <a:endParaRPr lang="en-US" sz="1400" dirty="0"/>
           </a:p>
@@ -15031,7 +15378,7 @@
         <p:spPr>
           <a:xfrm>
             <a:off x="0" y="658368"/>
-            <a:ext cx="5120640" cy="5833872"/>
+            <a:ext cx="1463040" cy="5833872"/>
           </a:xfrm>
           <a:prstGeom prst="rect">
             <a:avLst/>
@@ -15046,8 +15393,8 @@
         </p:nvSpPr>
         <p:spPr>
           <a:xfrm>
-            <a:off x="5349240" y="1005840"/>
-            <a:ext cx="6522415" cy="731520"/>
+            <a:off x="1691640" y="1005840"/>
+            <a:ext cx="10180015" cy="731520"/>
           </a:xfrm>
           <a:prstGeom prst="rect">
             <a:avLst/>
@@ -15073,7 +15420,7 @@
                 <a:ea typeface="Times New Roman" pitchFamily="34" charset="-122"/>
                 <a:cs typeface="Times New Roman" pitchFamily="34" charset="-120"/>
               </a:rPr>
-              <a:t>Evaluation 1</a:t>
+              <a:t>2. Importance and Conservation</a:t>
             </a:r>
             <a:endParaRPr lang="en-US" sz="3600" dirty="0"/>
           </a:p>
@@ -15087,8 +15434,47 @@
         </p:nvSpPr>
         <p:spPr>
           <a:xfrm>
-            <a:off x="5349240" y="1783080"/>
-            <a:ext cx="6522415" cy="4663440"/>
+            <a:off x="1691640" y="1737360"/>
+            <a:ext cx="10180015" cy="457200"/>
+          </a:xfrm>
+          <a:prstGeom prst="rect">
+            <a:avLst/>
+          </a:prstGeom>
+          <a:noFill/>
+          <a:ln/>
+        </p:spPr>
+        <p:txBody>
+          <a:bodyPr wrap="square" lIns="0" tIns="0" rIns="0" bIns="0" rtlCol="0" anchor="ctr"/>
+          <a:lstStyle/>
+          <a:p>
+            <a:pPr algn="l" indent="0" marL="0">
+              <a:buNone/>
+            </a:pPr>
+            <a:r>
+              <a:rPr lang="en-US" sz="3200" b="1" dirty="0">
+                <a:solidFill>
+                  <a:srgbClr val="990011"/>
+                </a:solidFill>
+                <a:latin typeface="Times New Roman" pitchFamily="34" charset="0"/>
+                <a:ea typeface="Times New Roman" pitchFamily="34" charset="-122"/>
+                <a:cs typeface="Times New Roman" pitchFamily="34" charset="-120"/>
+              </a:rPr>
+              <a:t>A) Importance</a:t>
+            </a:r>
+            <a:endParaRPr lang="en-US" sz="3200" dirty="0"/>
+          </a:p>
+        </p:txBody>
+      </p:sp>
+      <p:sp>
+        <p:nvSpPr>
+          <p:cNvPr id="6" name="Text 3"/>
+          <p:cNvSpPr/>
+          <p:nvPr/>
+        </p:nvSpPr>
+        <p:spPr>
+          <a:xfrm>
+            <a:off x="1691640" y="2240280"/>
+            <a:ext cx="10180015" cy="4206240"/>
           </a:xfrm>
           <a:prstGeom prst="rect">
             <a:avLst/>
@@ -15107,7 +15493,7 @@
               <a:buNone/>
             </a:pPr>
             <a:r>
-              <a:rPr lang="en-US" sz="4000" dirty="0">
+              <a:rPr lang="en-US" sz="4000" i="1" dirty="0">
                 <a:solidFill>
                   <a:srgbClr val="111111"/>
                 </a:solidFill>
@@ -15115,7 +15501,118 @@
                 <a:ea typeface="Times New Roman" pitchFamily="34" charset="-122"/>
                 <a:cs typeface="Times New Roman" pitchFamily="34" charset="-120"/>
               </a:rPr>
-              <a:t>Name two major fishing grounds.</a:t>
+              <a:t>Fish resources are important for the following reasons:</a:t>
+            </a:r>
+            <a:endParaRPr lang="en-US" sz="4000" dirty="0"/>
+          </a:p>
+          <a:p>
+            <a:pPr algn="l" indent="0" marL="0">
+              <a:spcAft>
+                <a:spcPts val="800"/>
+              </a:spcAft>
+              <a:buNone/>
+            </a:pPr>
+            <a:r>
+              <a:rPr lang="en-US" sz="4000" b="1" dirty="0">
+                <a:solidFill>
+                  <a:srgbClr val="111111"/>
+                </a:solidFill>
+                <a:latin typeface="Times New Roman" pitchFamily="34" charset="0"/>
+                <a:ea typeface="Times New Roman" pitchFamily="34" charset="-122"/>
+                <a:cs typeface="Times New Roman" pitchFamily="34" charset="-120"/>
+              </a:rPr>
+              <a:t>Protein: </a:t>
+            </a:r>
+            <a:pPr algn="l" indent="0" marL="0">
+              <a:spcAft>
+                <a:spcPts val="800"/>
+              </a:spcAft>
+              <a:buNone/>
+            </a:pPr>
+            <a:r>
+              <a:rPr lang="en-US" sz="4000" dirty="0">
+                <a:solidFill>
+                  <a:srgbClr val="111111"/>
+                </a:solidFill>
+                <a:latin typeface="Times New Roman" pitchFamily="34" charset="0"/>
+                <a:ea typeface="Times New Roman" pitchFamily="34" charset="-122"/>
+                <a:cs typeface="Times New Roman" pitchFamily="34" charset="-120"/>
+              </a:rPr>
+              <a:t>Fish is a cheap source of protein.</a:t>
+            </a:r>
+            <a:endParaRPr lang="en-US" sz="4000" dirty="0"/>
+          </a:p>
+          <a:p>
+            <a:pPr algn="l" indent="0" marL="0">
+              <a:spcAft>
+                <a:spcPts val="800"/>
+              </a:spcAft>
+              <a:buNone/>
+            </a:pPr>
+            <a:r>
+              <a:rPr lang="en-US" sz="4000" b="1" dirty="0">
+                <a:solidFill>
+                  <a:srgbClr val="111111"/>
+                </a:solidFill>
+                <a:latin typeface="Times New Roman" pitchFamily="34" charset="0"/>
+                <a:ea typeface="Times New Roman" pitchFamily="34" charset="-122"/>
+                <a:cs typeface="Times New Roman" pitchFamily="34" charset="-120"/>
+              </a:rPr>
+              <a:t>Jobs: </a:t>
+            </a:r>
+            <a:pPr algn="l" indent="0" marL="0">
+              <a:spcAft>
+                <a:spcPts val="800"/>
+              </a:spcAft>
+              <a:buNone/>
+            </a:pPr>
+            <a:r>
+              <a:rPr lang="en-US" sz="4000" dirty="0">
+                <a:solidFill>
+                  <a:srgbClr val="111111"/>
+                </a:solidFill>
+                <a:latin typeface="Times New Roman" pitchFamily="34" charset="0"/>
+                <a:ea typeface="Times New Roman" pitchFamily="34" charset="-122"/>
+                <a:cs typeface="Times New Roman" pitchFamily="34" charset="-120"/>
+              </a:rPr>
+              <a:t>Many people work as fishermen and sellers.</a:t>
+            </a:r>
+            <a:endParaRPr lang="en-US" sz="4000" dirty="0"/>
+          </a:p>
+          <a:p>
+            <a:pPr algn="l" indent="0" marL="0">
+              <a:spcAft>
+                <a:spcPts val="800"/>
+              </a:spcAft>
+              <a:buNone/>
+            </a:pPr>
+            <a:r>
+              <a:rPr lang="en-US" sz="4000" b="1" dirty="0">
+                <a:solidFill>
+                  <a:srgbClr val="111111"/>
+                </a:solidFill>
+                <a:latin typeface="Times New Roman" pitchFamily="34" charset="0"/>
+                <a:ea typeface="Times New Roman" pitchFamily="34" charset="-122"/>
+                <a:cs typeface="Times New Roman" pitchFamily="34" charset="-120"/>
+              </a:rPr>
+              <a:t>Export income: </a:t>
+            </a:r>
+            <a:pPr algn="l" indent="0" marL="0">
+              <a:spcAft>
+                <a:spcPts val="800"/>
+              </a:spcAft>
+              <a:buNone/>
+            </a:pPr>
+            <a:r>
+              <a:rPr lang="en-US" sz="4000" dirty="0">
+                <a:solidFill>
+                  <a:srgbClr val="111111"/>
+                </a:solidFill>
+                <a:latin typeface="Times New Roman" pitchFamily="34" charset="0"/>
+                <a:ea typeface="Times New Roman" pitchFamily="34" charset="-122"/>
+                <a:cs typeface="Times New Roman" pitchFamily="34" charset="-120"/>
+              </a:rPr>
+              <a:t>Fish is sold abroad.</a:t>
             </a:r>
             <a:endParaRPr lang="en-US" sz="4000" dirty="0"/>
           </a:p>
@@ -15227,7 +15724,7 @@
                 <a:ea typeface="Calibri" pitchFamily="34" charset="-122"/>
                 <a:cs typeface="Calibri" pitchFamily="34" charset="-120"/>
               </a:rPr>
-              <a:t>FORMATIVE EVALUATION</a:t>
+              <a:t>BOARD SUMMARY</a:t>
             </a:r>
             <a:endParaRPr lang="en-US" sz="1400" dirty="0"/>
           </a:p>
@@ -15250,7 +15747,7 @@
         <p:spPr>
           <a:xfrm>
             <a:off x="0" y="658368"/>
-            <a:ext cx="5120640" cy="5833872"/>
+            <a:ext cx="1463040" cy="5833872"/>
           </a:xfrm>
           <a:prstGeom prst="rect">
             <a:avLst/>
@@ -15265,8 +15762,8 @@
         </p:nvSpPr>
         <p:spPr>
           <a:xfrm>
-            <a:off x="5349240" y="1005840"/>
-            <a:ext cx="6522415" cy="731520"/>
+            <a:off x="1691640" y="1005840"/>
+            <a:ext cx="10180015" cy="731520"/>
           </a:xfrm>
           <a:prstGeom prst="rect">
             <a:avLst/>
@@ -15292,7 +15789,7 @@
                 <a:ea typeface="Times New Roman" pitchFamily="34" charset="-122"/>
                 <a:cs typeface="Times New Roman" pitchFamily="34" charset="-120"/>
               </a:rPr>
-              <a:t>Expected Answer</a:t>
+              <a:t>2. Importance and Conservation</a:t>
             </a:r>
             <a:endParaRPr lang="en-US" sz="3600" dirty="0"/>
           </a:p>
@@ -15306,8 +15803,47 @@
         </p:nvSpPr>
         <p:spPr>
           <a:xfrm>
-            <a:off x="5349240" y="1783080"/>
-            <a:ext cx="6522415" cy="4663440"/>
+            <a:off x="1691640" y="1737360"/>
+            <a:ext cx="10180015" cy="457200"/>
+          </a:xfrm>
+          <a:prstGeom prst="rect">
+            <a:avLst/>
+          </a:prstGeom>
+          <a:noFill/>
+          <a:ln/>
+        </p:spPr>
+        <p:txBody>
+          <a:bodyPr wrap="square" lIns="0" tIns="0" rIns="0" bIns="0" rtlCol="0" anchor="ctr"/>
+          <a:lstStyle/>
+          <a:p>
+            <a:pPr algn="l" indent="0" marL="0">
+              <a:buNone/>
+            </a:pPr>
+            <a:r>
+              <a:rPr lang="en-US" sz="3200" b="1" dirty="0">
+                <a:solidFill>
+                  <a:srgbClr val="990011"/>
+                </a:solidFill>
+                <a:latin typeface="Times New Roman" pitchFamily="34" charset="0"/>
+                <a:ea typeface="Times New Roman" pitchFamily="34" charset="-122"/>
+                <a:cs typeface="Times New Roman" pitchFamily="34" charset="-120"/>
+              </a:rPr>
+              <a:t>B) Conservation</a:t>
+            </a:r>
+            <a:endParaRPr lang="en-US" sz="3200" dirty="0"/>
+          </a:p>
+        </p:txBody>
+      </p:sp>
+      <p:sp>
+        <p:nvSpPr>
+          <p:cNvPr id="6" name="Text 3"/>
+          <p:cNvSpPr/>
+          <p:nvPr/>
+        </p:nvSpPr>
+        <p:spPr>
+          <a:xfrm>
+            <a:off x="1691640" y="2240280"/>
+            <a:ext cx="10180015" cy="4206240"/>
           </a:xfrm>
           <a:prstGeom prst="rect">
             <a:avLst/>
@@ -15326,7 +15862,7 @@
               <a:buNone/>
             </a:pPr>
             <a:r>
-              <a:rPr lang="en-US" sz="4000" dirty="0">
+              <a:rPr lang="en-US" sz="4000" i="1" dirty="0">
                 <a:solidFill>
                   <a:srgbClr val="111111"/>
                 </a:solidFill>
@@ -15334,7 +15870,118 @@
                 <a:ea typeface="Times New Roman" pitchFamily="34" charset="-122"/>
                 <a:cs typeface="Times New Roman" pitchFamily="34" charset="-120"/>
               </a:rPr>
-              <a:t>The North Sea and the Grand Banks of Newfoundland.</a:t>
+              <a:t>Fish stocks are protected by the following measures:</a:t>
+            </a:r>
+            <a:endParaRPr lang="en-US" sz="4000" dirty="0"/>
+          </a:p>
+          <a:p>
+            <a:pPr algn="l" indent="0" marL="0">
+              <a:spcAft>
+                <a:spcPts val="800"/>
+              </a:spcAft>
+              <a:buNone/>
+            </a:pPr>
+            <a:r>
+              <a:rPr lang="en-US" sz="4000" b="1" dirty="0">
+                <a:solidFill>
+                  <a:srgbClr val="111111"/>
+                </a:solidFill>
+                <a:latin typeface="Times New Roman" pitchFamily="34" charset="0"/>
+                <a:ea typeface="Times New Roman" pitchFamily="34" charset="-122"/>
+                <a:cs typeface="Times New Roman" pitchFamily="34" charset="-120"/>
+              </a:rPr>
+              <a:t>Fishing seasons and quotas: </a:t>
+            </a:r>
+            <a:pPr algn="l" indent="0" marL="0">
+              <a:spcAft>
+                <a:spcPts val="800"/>
+              </a:spcAft>
+              <a:buNone/>
+            </a:pPr>
+            <a:r>
+              <a:rPr lang="en-US" sz="4000" dirty="0">
+                <a:solidFill>
+                  <a:srgbClr val="111111"/>
+                </a:solidFill>
+                <a:latin typeface="Times New Roman" pitchFamily="34" charset="0"/>
+                <a:ea typeface="Times New Roman" pitchFamily="34" charset="-122"/>
+                <a:cs typeface="Times New Roman" pitchFamily="34" charset="-120"/>
+              </a:rPr>
+              <a:t>Fishing is limited in time and quantity.</a:t>
+            </a:r>
+            <a:endParaRPr lang="en-US" sz="4000" dirty="0"/>
+          </a:p>
+          <a:p>
+            <a:pPr algn="l" indent="0" marL="0">
+              <a:spcAft>
+                <a:spcPts val="800"/>
+              </a:spcAft>
+              <a:buNone/>
+            </a:pPr>
+            <a:r>
+              <a:rPr lang="en-US" sz="4000" b="1" dirty="0">
+                <a:solidFill>
+                  <a:srgbClr val="111111"/>
+                </a:solidFill>
+                <a:latin typeface="Times New Roman" pitchFamily="34" charset="0"/>
+                <a:ea typeface="Times New Roman" pitchFamily="34" charset="-122"/>
+                <a:cs typeface="Times New Roman" pitchFamily="34" charset="-120"/>
+              </a:rPr>
+              <a:t>Control of net sizes: </a:t>
+            </a:r>
+            <a:pPr algn="l" indent="0" marL="0">
+              <a:spcAft>
+                <a:spcPts val="800"/>
+              </a:spcAft>
+              <a:buNone/>
+            </a:pPr>
+            <a:r>
+              <a:rPr lang="en-US" sz="4000" dirty="0">
+                <a:solidFill>
+                  <a:srgbClr val="111111"/>
+                </a:solidFill>
+                <a:latin typeface="Times New Roman" pitchFamily="34" charset="0"/>
+                <a:ea typeface="Times New Roman" pitchFamily="34" charset="-122"/>
+                <a:cs typeface="Times New Roman" pitchFamily="34" charset="-120"/>
+              </a:rPr>
+              <a:t>Young fish can escape.</a:t>
+            </a:r>
+            <a:endParaRPr lang="en-US" sz="4000" dirty="0"/>
+          </a:p>
+          <a:p>
+            <a:pPr algn="l" indent="0" marL="0">
+              <a:spcAft>
+                <a:spcPts val="800"/>
+              </a:spcAft>
+              <a:buNone/>
+            </a:pPr>
+            <a:r>
+              <a:rPr lang="en-US" sz="4000" b="1" dirty="0">
+                <a:solidFill>
+                  <a:srgbClr val="111111"/>
+                </a:solidFill>
+                <a:latin typeface="Times New Roman" pitchFamily="34" charset="0"/>
+                <a:ea typeface="Times New Roman" pitchFamily="34" charset="-122"/>
+                <a:cs typeface="Times New Roman" pitchFamily="34" charset="-120"/>
+              </a:rPr>
+              <a:t>Refrigeration: </a:t>
+            </a:r>
+            <a:pPr algn="l" indent="0" marL="0">
+              <a:spcAft>
+                <a:spcPts val="800"/>
+              </a:spcAft>
+              <a:buNone/>
+            </a:pPr>
+            <a:r>
+              <a:rPr lang="en-US" sz="4000" dirty="0">
+                <a:solidFill>
+                  <a:srgbClr val="111111"/>
+                </a:solidFill>
+                <a:latin typeface="Times New Roman" pitchFamily="34" charset="0"/>
+                <a:ea typeface="Times New Roman" pitchFamily="34" charset="-122"/>
+                <a:cs typeface="Times New Roman" pitchFamily="34" charset="-120"/>
+              </a:rPr>
+              <a:t>Less fish is lost.</a:t>
             </a:r>
             <a:endParaRPr lang="en-US" sz="4000" dirty="0"/>
           </a:p>
@@ -15446,7 +16093,7 @@
                 <a:ea typeface="Calibri" pitchFamily="34" charset="-122"/>
                 <a:cs typeface="Calibri" pitchFamily="34" charset="-120"/>
               </a:rPr>
-              <a:t>FORMATIVE EVALUATION</a:t>
+              <a:t>BOARD SUMMARY</a:t>
             </a:r>
             <a:endParaRPr lang="en-US" sz="1400" dirty="0"/>
           </a:p>
@@ -15511,7 +16158,7 @@
                 <a:ea typeface="Times New Roman" pitchFamily="34" charset="-122"/>
                 <a:cs typeface="Times New Roman" pitchFamily="34" charset="-120"/>
               </a:rPr>
-              <a:t>Evaluation 2</a:t>
+              <a:t>2. Importance and Conservation</a:t>
             </a:r>
             <a:endParaRPr lang="en-US" sz="3600" dirty="0"/>
           </a:p>
@@ -15525,8 +16172,47 @@
         </p:nvSpPr>
         <p:spPr>
           <a:xfrm>
-            <a:off x="5349240" y="1783080"/>
-            <a:ext cx="6522415" cy="4663440"/>
+            <a:off x="5349240" y="1737360"/>
+            <a:ext cx="6522415" cy="457200"/>
+          </a:xfrm>
+          <a:prstGeom prst="rect">
+            <a:avLst/>
+          </a:prstGeom>
+          <a:noFill/>
+          <a:ln/>
+        </p:spPr>
+        <p:txBody>
+          <a:bodyPr wrap="square" lIns="0" tIns="0" rIns="0" bIns="0" rtlCol="0" anchor="ctr"/>
+          <a:lstStyle/>
+          <a:p>
+            <a:pPr algn="l" indent="0" marL="0">
+              <a:buNone/>
+            </a:pPr>
+            <a:r>
+              <a:rPr lang="en-US" sz="3200" b="1" dirty="0">
+                <a:solidFill>
+                  <a:srgbClr val="990011"/>
+                </a:solidFill>
+                <a:latin typeface="Times New Roman" pitchFamily="34" charset="0"/>
+                <a:ea typeface="Times New Roman" pitchFamily="34" charset="-122"/>
+                <a:cs typeface="Times New Roman" pitchFamily="34" charset="-120"/>
+              </a:rPr>
+              <a:t>B) Conservation (continued)</a:t>
+            </a:r>
+            <a:endParaRPr lang="en-US" sz="3200" dirty="0"/>
+          </a:p>
+        </p:txBody>
+      </p:sp>
+      <p:sp>
+        <p:nvSpPr>
+          <p:cNvPr id="6" name="Text 3"/>
+          <p:cNvSpPr/>
+          <p:nvPr/>
+        </p:nvSpPr>
+        <p:spPr>
+          <a:xfrm>
+            <a:off x="5349240" y="2240280"/>
+            <a:ext cx="6522415" cy="4206240"/>
           </a:xfrm>
           <a:prstGeom prst="rect">
             <a:avLst/>
@@ -15545,7 +16231,7 @@
               <a:buNone/>
             </a:pPr>
             <a:r>
-              <a:rPr lang="en-US" sz="4000" dirty="0">
+              <a:rPr lang="en-US" sz="4000" b="1" dirty="0">
                 <a:solidFill>
                   <a:srgbClr val="111111"/>
                 </a:solidFill>
@@ -15553,7 +16239,24 @@
                 <a:ea typeface="Times New Roman" pitchFamily="34" charset="-122"/>
                 <a:cs typeface="Times New Roman" pitchFamily="34" charset="-120"/>
               </a:rPr>
-              <a:t>Give two conservation measures.</a:t>
+              <a:t>Pisciculture: </a:t>
+            </a:r>
+            <a:pPr algn="l" indent="0" marL="0">
+              <a:spcAft>
+                <a:spcPts val="800"/>
+              </a:spcAft>
+              <a:buNone/>
+            </a:pPr>
+            <a:r>
+              <a:rPr lang="en-US" sz="4000" dirty="0">
+                <a:solidFill>
+                  <a:srgbClr val="111111"/>
+                </a:solidFill>
+                <a:latin typeface="Times New Roman" pitchFamily="34" charset="0"/>
+                <a:ea typeface="Times New Roman" pitchFamily="34" charset="-122"/>
+                <a:cs typeface="Times New Roman" pitchFamily="34" charset="-120"/>
+              </a:rPr>
+              <a:t>Fish are reared in ponds.</a:t>
             </a:r>
             <a:endParaRPr lang="en-US" sz="4000" dirty="0"/>
           </a:p>
@@ -15730,7 +16433,7 @@
                 <a:ea typeface="Times New Roman" pitchFamily="34" charset="-122"/>
                 <a:cs typeface="Times New Roman" pitchFamily="34" charset="-120"/>
               </a:rPr>
-              <a:t>Expected Answer</a:t>
+              <a:t>Evaluation 1</a:t>
             </a:r>
             <a:endParaRPr lang="en-US" sz="3600" dirty="0"/>
           </a:p>
@@ -15772,7 +16475,7 @@
                 <a:ea typeface="Times New Roman" pitchFamily="34" charset="-122"/>
                 <a:cs typeface="Times New Roman" pitchFamily="34" charset="-120"/>
               </a:rPr>
-              <a:t>Quotas and control of net sizes.</a:t>
+              <a:t>Name two major fishing grounds.</a:t>
             </a:r>
             <a:endParaRPr lang="en-US" sz="4000" dirty="0"/>
           </a:p>
@@ -15884,7 +16587,7 @@
                 <a:ea typeface="Calibri" pitchFamily="34" charset="-122"/>
                 <a:cs typeface="Calibri" pitchFamily="34" charset="-120"/>
               </a:rPr>
-              <a:t>REMEDIATION</a:t>
+              <a:t>FORMATIVE EVALUATION</a:t>
             </a:r>
             <a:endParaRPr lang="en-US" sz="1400" dirty="0"/>
           </a:p>
@@ -15907,7 +16610,7 @@
         <p:spPr>
           <a:xfrm>
             <a:off x="0" y="658368"/>
-            <a:ext cx="3840480" cy="5833872"/>
+            <a:ext cx="5120640" cy="5833872"/>
           </a:xfrm>
           <a:prstGeom prst="rect">
             <a:avLst/>
@@ -15922,8 +16625,8 @@
         </p:nvSpPr>
         <p:spPr>
           <a:xfrm>
-            <a:off x="4069080" y="1005840"/>
-            <a:ext cx="7802575" cy="731520"/>
+            <a:off x="5349240" y="1005840"/>
+            <a:ext cx="6522415" cy="731520"/>
           </a:xfrm>
           <a:prstGeom prst="rect">
             <a:avLst/>
@@ -15949,7 +16652,7 @@
                 <a:ea typeface="Times New Roman" pitchFamily="34" charset="-122"/>
                 <a:cs typeface="Times New Roman" pitchFamily="34" charset="-120"/>
               </a:rPr>
-              <a:t>Remediation</a:t>
+              <a:t>Expected Answer</a:t>
             </a:r>
             <a:endParaRPr lang="en-US" sz="3600" dirty="0"/>
           </a:p>
@@ -15963,8 +16666,8 @@
         </p:nvSpPr>
         <p:spPr>
           <a:xfrm>
-            <a:off x="4069080" y="1783080"/>
-            <a:ext cx="7802575" cy="4663440"/>
+            <a:off x="5349240" y="1783080"/>
+            <a:ext cx="6522415" cy="4663440"/>
           </a:xfrm>
           <a:prstGeom prst="rect">
             <a:avLst/>
@@ -15983,7 +16686,7 @@
               <a:buNone/>
             </a:pPr>
             <a:r>
-              <a:rPr lang="en-US" sz="4000" b="1" dirty="0">
+              <a:rPr lang="en-US" sz="4000" dirty="0">
                 <a:solidFill>
                   <a:srgbClr val="111111"/>
                 </a:solidFill>
@@ -15991,73 +16694,7 @@
                 <a:ea typeface="Times New Roman" pitchFamily="34" charset="-122"/>
                 <a:cs typeface="Times New Roman" pitchFamily="34" charset="-120"/>
               </a:rPr>
-              <a:t>Fill in the blanks:</a:t>
-            </a:r>
-            <a:endParaRPr lang="en-US" sz="4000" dirty="0"/>
-          </a:p>
-          <a:p>
-            <a:pPr algn="l" marL="342900" indent="-342900">
-              <a:spcAft>
-                <a:spcPts val="800"/>
-              </a:spcAft>
-              <a:buSzPct val="100000"/>
-              <a:buFont typeface="+mj-lt"/>
-              <a:buAutoNum type="arabicPeriod" startAt="1"/>
-            </a:pPr>
-            <a:r>
-              <a:rPr lang="en-US" sz="4000" dirty="0">
-                <a:solidFill>
-                  <a:srgbClr val="111111"/>
-                </a:solidFill>
-                <a:latin typeface="Times New Roman" pitchFamily="34" charset="0"/>
-                <a:ea typeface="Times New Roman" pitchFamily="34" charset="-122"/>
-                <a:cs typeface="Times New Roman" pitchFamily="34" charset="-120"/>
-              </a:rPr>
-              <a:t>Fish feed on tiny organisms called ______.</a:t>
-            </a:r>
-            <a:endParaRPr lang="en-US" sz="4000" dirty="0"/>
-          </a:p>
-          <a:p>
-            <a:pPr algn="l" marL="342900" indent="-342900">
-              <a:spcAft>
-                <a:spcPts val="800"/>
-              </a:spcAft>
-              <a:buSzPct val="100000"/>
-              <a:buFont typeface="+mj-lt"/>
-              <a:buAutoNum type="arabicPeriod" startAt="1"/>
-            </a:pPr>
-            <a:r>
-              <a:rPr lang="en-US" sz="4000" dirty="0">
-                <a:solidFill>
-                  <a:srgbClr val="111111"/>
-                </a:solidFill>
-                <a:latin typeface="Times New Roman" pitchFamily="34" charset="0"/>
-                <a:ea typeface="Times New Roman" pitchFamily="34" charset="-122"/>
-                <a:cs typeface="Times New Roman" pitchFamily="34" charset="-120"/>
-              </a:rPr>
-              <a:t>Rearing fish in ponds is ______.</a:t>
-            </a:r>
-            <a:endParaRPr lang="en-US" sz="4000" dirty="0"/>
-          </a:p>
-          <a:p>
-            <a:pPr algn="l" marL="342900" indent="-342900">
-              <a:spcAft>
-                <a:spcPts val="800"/>
-              </a:spcAft>
-              <a:buSzPct val="100000"/>
-              <a:buFont typeface="+mj-lt"/>
-              <a:buAutoNum type="arabicPeriod" startAt="1"/>
-            </a:pPr>
-            <a:r>
-              <a:rPr lang="en-US" sz="4000" dirty="0">
-                <a:solidFill>
-                  <a:srgbClr val="111111"/>
-                </a:solidFill>
-                <a:latin typeface="Times New Roman" pitchFamily="34" charset="0"/>
-                <a:ea typeface="Times New Roman" pitchFamily="34" charset="-122"/>
-                <a:cs typeface="Times New Roman" pitchFamily="34" charset="-120"/>
-              </a:rPr>
-              <a:t>Catching too many fish is ______.</a:t>
+              <a:t>The North Sea and the Grand Banks of Newfoundland.</a:t>
             </a:r>
             <a:endParaRPr lang="en-US" sz="4000" dirty="0"/>
           </a:p>
@@ -16169,7 +16806,7 @@
                 <a:ea typeface="Calibri" pitchFamily="34" charset="-122"/>
                 <a:cs typeface="Calibri" pitchFamily="34" charset="-120"/>
               </a:rPr>
-              <a:t>HOMEWORK</a:t>
+              <a:t>FORMATIVE EVALUATION</a:t>
             </a:r>
             <a:endParaRPr lang="en-US" sz="1400" dirty="0"/>
           </a:p>
@@ -16234,7 +16871,7 @@
                 <a:ea typeface="Times New Roman" pitchFamily="34" charset="-122"/>
                 <a:cs typeface="Times New Roman" pitchFamily="34" charset="-120"/>
               </a:rPr>
-              <a:t>Homework</a:t>
+              <a:t>Evaluation 2</a:t>
             </a:r>
             <a:endParaRPr lang="en-US" sz="3600" dirty="0"/>
           </a:p>
@@ -16276,7 +16913,7 @@
                 <a:ea typeface="Times New Roman" pitchFamily="34" charset="-122"/>
                 <a:cs typeface="Times New Roman" pitchFamily="34" charset="-120"/>
               </a:rPr>
-              <a:t>List three places in Cameroon where people fish.</a:t>
+              <a:t>Give two conservation measures.</a:t>
             </a:r>
             <a:endParaRPr lang="en-US" sz="4000" dirty="0"/>
           </a:p>
@@ -16388,7 +17025,7 @@
                 <a:ea typeface="Calibri" pitchFamily="34" charset="-122"/>
                 <a:cs typeface="Calibri" pitchFamily="34" charset="-120"/>
               </a:rPr>
-              <a:t>NEXT LESSON</a:t>
+              <a:t>FORMATIVE EVALUATION</a:t>
             </a:r>
             <a:endParaRPr lang="en-US" sz="1400" dirty="0"/>
           </a:p>
@@ -16453,7 +17090,7 @@
                 <a:ea typeface="Times New Roman" pitchFamily="34" charset="-122"/>
                 <a:cs typeface="Times New Roman" pitchFamily="34" charset="-120"/>
               </a:rPr>
-              <a:t>Next Lesson</a:t>
+              <a:t>Expected Answer</a:t>
             </a:r>
             <a:endParaRPr lang="en-US" sz="3600" dirty="0"/>
           </a:p>
@@ -16477,17 +17114,17 @@
           <a:ln/>
         </p:spPr>
         <p:txBody>
-          <a:bodyPr wrap="square" lIns="0" tIns="0" rIns="0" bIns="0" rtlCol="0" anchor="ctr"/>
-          <a:lstStyle/>
-          <a:p>
-            <a:pPr algn="ctr" indent="0" marL="0">
+          <a:bodyPr wrap="square" lIns="0" tIns="0" rIns="0" bIns="0" rtlCol="0" anchor="t"/>
+          <a:lstStyle/>
+          <a:p>
+            <a:pPr algn="l" indent="0" marL="0">
               <a:spcAft>
                 <a:spcPts val="800"/>
               </a:spcAft>
               <a:buNone/>
             </a:pPr>
             <a:r>
-              <a:rPr lang="en-US" sz="4000" b="1" dirty="0">
+              <a:rPr lang="en-US" sz="4000" dirty="0">
                 <a:solidFill>
                   <a:srgbClr val="111111"/>
                 </a:solidFill>
@@ -16495,27 +17132,7 @@
                 <a:ea typeface="Times New Roman" pitchFamily="34" charset="-122"/>
                 <a:cs typeface="Times New Roman" pitchFamily="34" charset="-120"/>
               </a:rPr>
-              <a:t>Our next lesson will be on:</a:t>
-            </a:r>
-            <a:endParaRPr lang="en-US" sz="4000" dirty="0"/>
-          </a:p>
-          <a:p>
-            <a:pPr algn="ctr" indent="0" marL="0">
-              <a:spcAft>
-                <a:spcPts val="800"/>
-              </a:spcAft>
-              <a:buNone/>
-            </a:pPr>
-            <a:r>
-              <a:rPr lang="en-US" sz="4000" b="1" dirty="0">
-                <a:solidFill>
-                  <a:srgbClr val="990011"/>
-                </a:solidFill>
-                <a:latin typeface="Times New Roman" pitchFamily="34" charset="0"/>
-                <a:ea typeface="Times New Roman" pitchFamily="34" charset="-122"/>
-                <a:cs typeface="Times New Roman" pitchFamily="34" charset="-120"/>
-              </a:rPr>
-              <a:t>Lesson 42: The Management of Fish Resources in Cameroon</a:t>
+              <a:t>Quotas and control of net sizes.</a:t>
             </a:r>
             <a:endParaRPr lang="en-US" sz="4000" dirty="0"/>
           </a:p>
@@ -16627,6 +17244,968 @@
                 <a:ea typeface="Calibri" pitchFamily="34" charset="-122"/>
                 <a:cs typeface="Calibri" pitchFamily="34" charset="-120"/>
               </a:rPr>
+              <a:t>REMEDIATION</a:t>
+            </a:r>
+            <a:endParaRPr lang="en-US" sz="1400" dirty="0"/>
+          </a:p>
+        </p:txBody>
+      </p:sp>
+      <p:pic>
+        <p:nvPicPr>
+          <p:cNvPr id="3" name="Image 0" descr="/home/claude/f4/img/minesec_sheet.png">    </p:cNvPr>
+          <p:cNvPicPr>
+            <a:picLocks noChangeAspect="1"/>
+          </p:cNvPicPr>
+          <p:nvPr/>
+        </p:nvPicPr>
+        <p:blipFill>
+          <a:blip r:embed="rId1"/>
+          <a:stretch>
+            <a:fillRect/>
+          </a:stretch>
+        </p:blipFill>
+        <p:spPr>
+          <a:xfrm>
+            <a:off x="0" y="658368"/>
+            <a:ext cx="3840480" cy="5833872"/>
+          </a:xfrm>
+          <a:prstGeom prst="rect">
+            <a:avLst/>
+          </a:prstGeom>
+        </p:spPr>
+      </p:pic>
+      <p:sp>
+        <p:nvSpPr>
+          <p:cNvPr id="4" name="Text 1"/>
+          <p:cNvSpPr/>
+          <p:nvPr/>
+        </p:nvSpPr>
+        <p:spPr>
+          <a:xfrm>
+            <a:off x="4069080" y="1005840"/>
+            <a:ext cx="7802575" cy="731520"/>
+          </a:xfrm>
+          <a:prstGeom prst="rect">
+            <a:avLst/>
+          </a:prstGeom>
+          <a:noFill/>
+          <a:ln/>
+        </p:spPr>
+        <p:txBody>
+          <a:bodyPr wrap="square" lIns="0" tIns="0" rIns="0" bIns="0" rtlCol="0" anchor="ctr">
+            <a:normAutofit/>
+          </a:bodyPr>
+          <a:lstStyle/>
+          <a:p>
+            <a:pPr algn="ctr" indent="0" marL="0">
+              <a:buNone/>
+            </a:pPr>
+            <a:r>
+              <a:rPr lang="en-US" sz="3600" b="1" dirty="0">
+                <a:solidFill>
+                  <a:srgbClr val="990011"/>
+                </a:solidFill>
+                <a:latin typeface="Times New Roman" pitchFamily="34" charset="0"/>
+                <a:ea typeface="Times New Roman" pitchFamily="34" charset="-122"/>
+                <a:cs typeface="Times New Roman" pitchFamily="34" charset="-120"/>
+              </a:rPr>
+              <a:t>Remediation</a:t>
+            </a:r>
+            <a:endParaRPr lang="en-US" sz="3600" dirty="0"/>
+          </a:p>
+        </p:txBody>
+      </p:sp>
+      <p:sp>
+        <p:nvSpPr>
+          <p:cNvPr id="5" name="Text 2"/>
+          <p:cNvSpPr/>
+          <p:nvPr/>
+        </p:nvSpPr>
+        <p:spPr>
+          <a:xfrm>
+            <a:off x="4069080" y="1783080"/>
+            <a:ext cx="7802575" cy="4663440"/>
+          </a:xfrm>
+          <a:prstGeom prst="rect">
+            <a:avLst/>
+          </a:prstGeom>
+          <a:noFill/>
+          <a:ln/>
+        </p:spPr>
+        <p:txBody>
+          <a:bodyPr wrap="square" lIns="0" tIns="0" rIns="0" bIns="0" rtlCol="0" anchor="t"/>
+          <a:lstStyle/>
+          <a:p>
+            <a:pPr algn="l" indent="0" marL="0">
+              <a:spcAft>
+                <a:spcPts val="800"/>
+              </a:spcAft>
+              <a:buNone/>
+            </a:pPr>
+            <a:r>
+              <a:rPr lang="en-US" sz="4000" b="1" dirty="0">
+                <a:solidFill>
+                  <a:srgbClr val="111111"/>
+                </a:solidFill>
+                <a:latin typeface="Times New Roman" pitchFamily="34" charset="0"/>
+                <a:ea typeface="Times New Roman" pitchFamily="34" charset="-122"/>
+                <a:cs typeface="Times New Roman" pitchFamily="34" charset="-120"/>
+              </a:rPr>
+              <a:t>Fill in the blanks:</a:t>
+            </a:r>
+            <a:endParaRPr lang="en-US" sz="4000" dirty="0"/>
+          </a:p>
+          <a:p>
+            <a:pPr algn="l" marL="342900" indent="-342900">
+              <a:spcAft>
+                <a:spcPts val="800"/>
+              </a:spcAft>
+              <a:buSzPct val="100000"/>
+              <a:buFont typeface="+mj-lt"/>
+              <a:buAutoNum type="arabicPeriod" startAt="1"/>
+            </a:pPr>
+            <a:r>
+              <a:rPr lang="en-US" sz="4000" dirty="0">
+                <a:solidFill>
+                  <a:srgbClr val="111111"/>
+                </a:solidFill>
+                <a:latin typeface="Times New Roman" pitchFamily="34" charset="0"/>
+                <a:ea typeface="Times New Roman" pitchFamily="34" charset="-122"/>
+                <a:cs typeface="Times New Roman" pitchFamily="34" charset="-120"/>
+              </a:rPr>
+              <a:t>Fish feed on tiny organisms called ______.</a:t>
+            </a:r>
+            <a:endParaRPr lang="en-US" sz="4000" dirty="0"/>
+          </a:p>
+          <a:p>
+            <a:pPr algn="l" marL="342900" indent="-342900">
+              <a:spcAft>
+                <a:spcPts val="800"/>
+              </a:spcAft>
+              <a:buSzPct val="100000"/>
+              <a:buFont typeface="+mj-lt"/>
+              <a:buAutoNum type="arabicPeriod" startAt="1"/>
+            </a:pPr>
+            <a:r>
+              <a:rPr lang="en-US" sz="4000" dirty="0">
+                <a:solidFill>
+                  <a:srgbClr val="111111"/>
+                </a:solidFill>
+                <a:latin typeface="Times New Roman" pitchFamily="34" charset="0"/>
+                <a:ea typeface="Times New Roman" pitchFamily="34" charset="-122"/>
+                <a:cs typeface="Times New Roman" pitchFamily="34" charset="-120"/>
+              </a:rPr>
+              <a:t>Rearing fish in ponds is ______.</a:t>
+            </a:r>
+            <a:endParaRPr lang="en-US" sz="4000" dirty="0"/>
+          </a:p>
+          <a:p>
+            <a:pPr algn="l" marL="342900" indent="-342900">
+              <a:spcAft>
+                <a:spcPts val="800"/>
+              </a:spcAft>
+              <a:buSzPct val="100000"/>
+              <a:buFont typeface="+mj-lt"/>
+              <a:buAutoNum type="arabicPeriod" startAt="1"/>
+            </a:pPr>
+            <a:r>
+              <a:rPr lang="en-US" sz="4000" dirty="0">
+                <a:solidFill>
+                  <a:srgbClr val="111111"/>
+                </a:solidFill>
+                <a:latin typeface="Times New Roman" pitchFamily="34" charset="0"/>
+                <a:ea typeface="Times New Roman" pitchFamily="34" charset="-122"/>
+                <a:cs typeface="Times New Roman" pitchFamily="34" charset="-120"/>
+              </a:rPr>
+              <a:t>Catching too many fish is ______.</a:t>
+            </a:r>
+            <a:endParaRPr lang="en-US" sz="4000" dirty="0"/>
+          </a:p>
+        </p:txBody>
+      </p:sp>
+      <p:sp>
+        <p:nvSpPr>
+          <p:cNvPr id="25" name="Slide Number Placeholder 0"/>
+          <p:cNvSpPr>
+            <a:spLocks noGrp="1"/>
+          </p:cNvSpPr>
+          <p:nvPr>
+            <p:ph type="sldNum" sz="quarter" idx="4294967295"/>
+          </p:nvPr>
+        </p:nvSpPr>
+        <p:spPr>
+          <a:xfrm>
+            <a:off x="27432" y="91440"/>
+            <a:ext cx="585216" cy="475488"/>
+          </a:xfrm>
+          <a:prstGeom prst="rect">
+            <a:avLst/>
+          </a:prstGeom>
+          <a:extLst>
+            <a:ext uri="{C572A759-6A51-4108-AA02-DFA0A04FC94B}">
+              <ma14:wrappingTextBoxFlag xmlns:ma14="http://schemas.microsoft.com/office/mac/drawingml/2011/main" val="0"/>
+            </a:ext>
+          </a:extLst>
+        </p:spPr>
+        <p:txBody>
+          <a:bodyPr/>
+          <a:lstStyle>
+            <a:lvl1pPr>
+              <a:defRPr sz="2000">
+                <a:solidFill>
+                  <a:srgbClr val="FFFFFF"/>
+                </a:solidFill>
+                <a:latin typeface="Calibri"/>
+                <a:ea typeface="Calibri"/>
+                <a:cs typeface="Calibri"/>
+              </a:defRPr>
+            </a:lvl1pPr>
+          </a:lstStyle>
+          <a:p>
+            <a:pPr algn="ctr"/>
+            <a:fld id="{F7021451-1387-4CA6-816F-3879F97B5CBC}" type="slidenum">
+              <a:rPr b="1" lang="en-US"/>
+              <a:t>47</a:t>
+            </a:fld>
+            <a:endParaRPr lang="en-US"/>
+          </a:p>
+        </p:txBody>
+      </p:sp>
+    </p:spTree>
+  </p:cSld>
+  <p:clrMapOvr>
+    <a:masterClrMapping/>
+  </p:clrMapOvr>
+</p:sld>
+</file>
+
+<file path=ppt/slides/slide48.xml><?xml version="1.0" encoding="utf-8"?>
+<p:sld xmlns:a="http://schemas.openxmlformats.org/drawingml/2006/main" xmlns:r="http://schemas.openxmlformats.org/officeDocument/2006/relationships" xmlns:p="http://schemas.openxmlformats.org/presentationml/2006/main">
+  <p:cSld name="Slide 48">
+    <p:spTree>
+      <p:nvGrpSpPr>
+        <p:cNvPr id="1" name=""/>
+        <p:cNvGrpSpPr/>
+        <p:nvPr/>
+      </p:nvGrpSpPr>
+      <p:grpSpPr>
+        <a:xfrm>
+          <a:off x="0" y="0"/>
+          <a:ext cx="0" cy="0"/>
+          <a:chOff x="0" y="0"/>
+          <a:chExt cx="0" cy="0"/>
+        </a:xfrm>
+      </p:grpSpPr>
+      <p:sp>
+        <p:nvSpPr>
+          <p:cNvPr id="2" name="Text 0"/>
+          <p:cNvSpPr/>
+          <p:nvPr/>
+        </p:nvSpPr>
+        <p:spPr>
+          <a:xfrm>
+            <a:off x="457200" y="713232"/>
+            <a:ext cx="11368735" cy="274320"/>
+          </a:xfrm>
+          <a:prstGeom prst="rect">
+            <a:avLst/>
+          </a:prstGeom>
+          <a:noFill/>
+          <a:ln/>
+        </p:spPr>
+        <p:txBody>
+          <a:bodyPr wrap="square" lIns="0" tIns="0" rIns="0" bIns="0" rtlCol="0" anchor="ctr"/>
+          <a:lstStyle/>
+          <a:p>
+            <a:pPr algn="r" indent="0" marL="0">
+              <a:buNone/>
+            </a:pPr>
+            <a:r>
+              <a:rPr lang="en-US" sz="1400" b="1" dirty="0">
+                <a:solidFill>
+                  <a:srgbClr val="1C3F6E"/>
+                </a:solidFill>
+                <a:latin typeface="Calibri" pitchFamily="34" charset="0"/>
+                <a:ea typeface="Calibri" pitchFamily="34" charset="-122"/>
+                <a:cs typeface="Calibri" pitchFamily="34" charset="-120"/>
+              </a:rPr>
+              <a:t>HOMEWORK</a:t>
+            </a:r>
+            <a:endParaRPr lang="en-US" sz="1400" dirty="0"/>
+          </a:p>
+        </p:txBody>
+      </p:sp>
+      <p:pic>
+        <p:nvPicPr>
+          <p:cNvPr id="3" name="Image 0" descr="/home/claude/f4/img/minesec_sheet.png">    </p:cNvPr>
+          <p:cNvPicPr>
+            <a:picLocks noChangeAspect="1"/>
+          </p:cNvPicPr>
+          <p:nvPr/>
+        </p:nvPicPr>
+        <p:blipFill>
+          <a:blip r:embed="rId1"/>
+          <a:stretch>
+            <a:fillRect/>
+          </a:stretch>
+        </p:blipFill>
+        <p:spPr>
+          <a:xfrm>
+            <a:off x="0" y="658368"/>
+            <a:ext cx="5120640" cy="5833872"/>
+          </a:xfrm>
+          <a:prstGeom prst="rect">
+            <a:avLst/>
+          </a:prstGeom>
+        </p:spPr>
+      </p:pic>
+      <p:sp>
+        <p:nvSpPr>
+          <p:cNvPr id="4" name="Text 1"/>
+          <p:cNvSpPr/>
+          <p:nvPr/>
+        </p:nvSpPr>
+        <p:spPr>
+          <a:xfrm>
+            <a:off x="5349240" y="1005840"/>
+            <a:ext cx="6522415" cy="731520"/>
+          </a:xfrm>
+          <a:prstGeom prst="rect">
+            <a:avLst/>
+          </a:prstGeom>
+          <a:noFill/>
+          <a:ln/>
+        </p:spPr>
+        <p:txBody>
+          <a:bodyPr wrap="square" lIns="0" tIns="0" rIns="0" bIns="0" rtlCol="0" anchor="ctr">
+            <a:normAutofit/>
+          </a:bodyPr>
+          <a:lstStyle/>
+          <a:p>
+            <a:pPr algn="ctr" indent="0" marL="0">
+              <a:buNone/>
+            </a:pPr>
+            <a:r>
+              <a:rPr lang="en-US" sz="3600" b="1" dirty="0">
+                <a:solidFill>
+                  <a:srgbClr val="990011"/>
+                </a:solidFill>
+                <a:latin typeface="Times New Roman" pitchFamily="34" charset="0"/>
+                <a:ea typeface="Times New Roman" pitchFamily="34" charset="-122"/>
+                <a:cs typeface="Times New Roman" pitchFamily="34" charset="-120"/>
+              </a:rPr>
+              <a:t>Homework</a:t>
+            </a:r>
+            <a:endParaRPr lang="en-US" sz="3600" dirty="0"/>
+          </a:p>
+        </p:txBody>
+      </p:sp>
+      <p:sp>
+        <p:nvSpPr>
+          <p:cNvPr id="5" name="Text 2"/>
+          <p:cNvSpPr/>
+          <p:nvPr/>
+        </p:nvSpPr>
+        <p:spPr>
+          <a:xfrm>
+            <a:off x="5349240" y="1783080"/>
+            <a:ext cx="6522415" cy="4663440"/>
+          </a:xfrm>
+          <a:prstGeom prst="rect">
+            <a:avLst/>
+          </a:prstGeom>
+          <a:noFill/>
+          <a:ln/>
+        </p:spPr>
+        <p:txBody>
+          <a:bodyPr wrap="square" lIns="0" tIns="0" rIns="0" bIns="0" rtlCol="0" anchor="t"/>
+          <a:lstStyle/>
+          <a:p>
+            <a:pPr algn="l" indent="0" marL="0">
+              <a:spcAft>
+                <a:spcPts val="800"/>
+              </a:spcAft>
+              <a:buNone/>
+            </a:pPr>
+            <a:r>
+              <a:rPr lang="en-US" sz="4000" dirty="0">
+                <a:solidFill>
+                  <a:srgbClr val="111111"/>
+                </a:solidFill>
+                <a:latin typeface="Times New Roman" pitchFamily="34" charset="0"/>
+                <a:ea typeface="Times New Roman" pitchFamily="34" charset="-122"/>
+                <a:cs typeface="Times New Roman" pitchFamily="34" charset="-120"/>
+              </a:rPr>
+              <a:t>List three places in Cameroon where people fish.</a:t>
+            </a:r>
+            <a:endParaRPr lang="en-US" sz="4000" dirty="0"/>
+          </a:p>
+        </p:txBody>
+      </p:sp>
+      <p:sp>
+        <p:nvSpPr>
+          <p:cNvPr id="25" name="Slide Number Placeholder 0"/>
+          <p:cNvSpPr>
+            <a:spLocks noGrp="1"/>
+          </p:cNvSpPr>
+          <p:nvPr>
+            <p:ph type="sldNum" sz="quarter" idx="4294967295"/>
+          </p:nvPr>
+        </p:nvSpPr>
+        <p:spPr>
+          <a:xfrm>
+            <a:off x="27432" y="91440"/>
+            <a:ext cx="585216" cy="475488"/>
+          </a:xfrm>
+          <a:prstGeom prst="rect">
+            <a:avLst/>
+          </a:prstGeom>
+          <a:extLst>
+            <a:ext uri="{C572A759-6A51-4108-AA02-DFA0A04FC94B}">
+              <ma14:wrappingTextBoxFlag xmlns:ma14="http://schemas.microsoft.com/office/mac/drawingml/2011/main" val="0"/>
+            </a:ext>
+          </a:extLst>
+        </p:spPr>
+        <p:txBody>
+          <a:bodyPr/>
+          <a:lstStyle>
+            <a:lvl1pPr>
+              <a:defRPr sz="2000">
+                <a:solidFill>
+                  <a:srgbClr val="FFFFFF"/>
+                </a:solidFill>
+                <a:latin typeface="Calibri"/>
+                <a:ea typeface="Calibri"/>
+                <a:cs typeface="Calibri"/>
+              </a:defRPr>
+            </a:lvl1pPr>
+          </a:lstStyle>
+          <a:p>
+            <a:pPr algn="ctr"/>
+            <a:fld id="{F7021451-1387-4CA6-816F-3879F97B5CBC}" type="slidenum">
+              <a:rPr b="1" lang="en-US"/>
+              <a:t>48</a:t>
+            </a:fld>
+            <a:endParaRPr lang="en-US"/>
+          </a:p>
+        </p:txBody>
+      </p:sp>
+    </p:spTree>
+  </p:cSld>
+  <p:clrMapOvr>
+    <a:masterClrMapping/>
+  </p:clrMapOvr>
+</p:sld>
+</file>
+
+<file path=ppt/slides/slide49.xml><?xml version="1.0" encoding="utf-8"?>
+<p:sld xmlns:a="http://schemas.openxmlformats.org/drawingml/2006/main" xmlns:r="http://schemas.openxmlformats.org/officeDocument/2006/relationships" xmlns:p="http://schemas.openxmlformats.org/presentationml/2006/main">
+  <p:cSld name="Slide 49">
+    <p:spTree>
+      <p:nvGrpSpPr>
+        <p:cNvPr id="1" name=""/>
+        <p:cNvGrpSpPr/>
+        <p:nvPr/>
+      </p:nvGrpSpPr>
+      <p:grpSpPr>
+        <a:xfrm>
+          <a:off x="0" y="0"/>
+          <a:ext cx="0" cy="0"/>
+          <a:chOff x="0" y="0"/>
+          <a:chExt cx="0" cy="0"/>
+        </a:xfrm>
+      </p:grpSpPr>
+      <p:sp>
+        <p:nvSpPr>
+          <p:cNvPr id="2" name="Text 0"/>
+          <p:cNvSpPr/>
+          <p:nvPr/>
+        </p:nvSpPr>
+        <p:spPr>
+          <a:xfrm>
+            <a:off x="457200" y="713232"/>
+            <a:ext cx="11368735" cy="274320"/>
+          </a:xfrm>
+          <a:prstGeom prst="rect">
+            <a:avLst/>
+          </a:prstGeom>
+          <a:noFill/>
+          <a:ln/>
+        </p:spPr>
+        <p:txBody>
+          <a:bodyPr wrap="square" lIns="0" tIns="0" rIns="0" bIns="0" rtlCol="0" anchor="ctr"/>
+          <a:lstStyle/>
+          <a:p>
+            <a:pPr algn="r" indent="0" marL="0">
+              <a:buNone/>
+            </a:pPr>
+            <a:r>
+              <a:rPr lang="en-US" sz="1400" b="1" dirty="0">
+                <a:solidFill>
+                  <a:srgbClr val="1C3F6E"/>
+                </a:solidFill>
+                <a:latin typeface="Calibri" pitchFamily="34" charset="0"/>
+                <a:ea typeface="Calibri" pitchFamily="34" charset="-122"/>
+                <a:cs typeface="Calibri" pitchFamily="34" charset="-120"/>
+              </a:rPr>
+              <a:t>NEXT LESSON</a:t>
+            </a:r>
+            <a:endParaRPr lang="en-US" sz="1400" dirty="0"/>
+          </a:p>
+        </p:txBody>
+      </p:sp>
+      <p:pic>
+        <p:nvPicPr>
+          <p:cNvPr id="3" name="Image 0" descr="/home/claude/f4/img/minesec_sheet.png">    </p:cNvPr>
+          <p:cNvPicPr>
+            <a:picLocks noChangeAspect="1"/>
+          </p:cNvPicPr>
+          <p:nvPr/>
+        </p:nvPicPr>
+        <p:blipFill>
+          <a:blip r:embed="rId1"/>
+          <a:stretch>
+            <a:fillRect/>
+          </a:stretch>
+        </p:blipFill>
+        <p:spPr>
+          <a:xfrm>
+            <a:off x="0" y="658368"/>
+            <a:ext cx="5120640" cy="5833872"/>
+          </a:xfrm>
+          <a:prstGeom prst="rect">
+            <a:avLst/>
+          </a:prstGeom>
+        </p:spPr>
+      </p:pic>
+      <p:sp>
+        <p:nvSpPr>
+          <p:cNvPr id="4" name="Text 1"/>
+          <p:cNvSpPr/>
+          <p:nvPr/>
+        </p:nvSpPr>
+        <p:spPr>
+          <a:xfrm>
+            <a:off x="5349240" y="1005840"/>
+            <a:ext cx="6522415" cy="731520"/>
+          </a:xfrm>
+          <a:prstGeom prst="rect">
+            <a:avLst/>
+          </a:prstGeom>
+          <a:noFill/>
+          <a:ln/>
+        </p:spPr>
+        <p:txBody>
+          <a:bodyPr wrap="square" lIns="0" tIns="0" rIns="0" bIns="0" rtlCol="0" anchor="ctr">
+            <a:normAutofit/>
+          </a:bodyPr>
+          <a:lstStyle/>
+          <a:p>
+            <a:pPr algn="ctr" indent="0" marL="0">
+              <a:buNone/>
+            </a:pPr>
+            <a:r>
+              <a:rPr lang="en-US" sz="3600" b="1" dirty="0">
+                <a:solidFill>
+                  <a:srgbClr val="990011"/>
+                </a:solidFill>
+                <a:latin typeface="Times New Roman" pitchFamily="34" charset="0"/>
+                <a:ea typeface="Times New Roman" pitchFamily="34" charset="-122"/>
+                <a:cs typeface="Times New Roman" pitchFamily="34" charset="-120"/>
+              </a:rPr>
+              <a:t>Next Lesson</a:t>
+            </a:r>
+            <a:endParaRPr lang="en-US" sz="3600" dirty="0"/>
+          </a:p>
+        </p:txBody>
+      </p:sp>
+      <p:sp>
+        <p:nvSpPr>
+          <p:cNvPr id="5" name="Text 2"/>
+          <p:cNvSpPr/>
+          <p:nvPr/>
+        </p:nvSpPr>
+        <p:spPr>
+          <a:xfrm>
+            <a:off x="5349240" y="1783080"/>
+            <a:ext cx="6522415" cy="4663440"/>
+          </a:xfrm>
+          <a:prstGeom prst="rect">
+            <a:avLst/>
+          </a:prstGeom>
+          <a:noFill/>
+          <a:ln/>
+        </p:spPr>
+        <p:txBody>
+          <a:bodyPr wrap="square" lIns="0" tIns="0" rIns="0" bIns="0" rtlCol="0" anchor="ctr"/>
+          <a:lstStyle/>
+          <a:p>
+            <a:pPr algn="ctr" indent="0" marL="0">
+              <a:spcAft>
+                <a:spcPts val="800"/>
+              </a:spcAft>
+              <a:buNone/>
+            </a:pPr>
+            <a:r>
+              <a:rPr lang="en-US" sz="4000" b="1" dirty="0">
+                <a:solidFill>
+                  <a:srgbClr val="111111"/>
+                </a:solidFill>
+                <a:latin typeface="Times New Roman" pitchFamily="34" charset="0"/>
+                <a:ea typeface="Times New Roman" pitchFamily="34" charset="-122"/>
+                <a:cs typeface="Times New Roman" pitchFamily="34" charset="-120"/>
+              </a:rPr>
+              <a:t>Our next lesson will be on:</a:t>
+            </a:r>
+            <a:endParaRPr lang="en-US" sz="4000" dirty="0"/>
+          </a:p>
+          <a:p>
+            <a:pPr algn="ctr" indent="0" marL="0">
+              <a:spcAft>
+                <a:spcPts val="800"/>
+              </a:spcAft>
+              <a:buNone/>
+            </a:pPr>
+            <a:r>
+              <a:rPr lang="en-US" sz="4000" b="1" dirty="0">
+                <a:solidFill>
+                  <a:srgbClr val="990011"/>
+                </a:solidFill>
+                <a:latin typeface="Times New Roman" pitchFamily="34" charset="0"/>
+                <a:ea typeface="Times New Roman" pitchFamily="34" charset="-122"/>
+                <a:cs typeface="Times New Roman" pitchFamily="34" charset="-120"/>
+              </a:rPr>
+              <a:t>Lesson 42: The Management of Fish Resources in Cameroon</a:t>
+            </a:r>
+            <a:endParaRPr lang="en-US" sz="4000" dirty="0"/>
+          </a:p>
+        </p:txBody>
+      </p:sp>
+      <p:sp>
+        <p:nvSpPr>
+          <p:cNvPr id="25" name="Slide Number Placeholder 0"/>
+          <p:cNvSpPr>
+            <a:spLocks noGrp="1"/>
+          </p:cNvSpPr>
+          <p:nvPr>
+            <p:ph type="sldNum" sz="quarter" idx="4294967295"/>
+          </p:nvPr>
+        </p:nvSpPr>
+        <p:spPr>
+          <a:xfrm>
+            <a:off x="27432" y="91440"/>
+            <a:ext cx="585216" cy="475488"/>
+          </a:xfrm>
+          <a:prstGeom prst="rect">
+            <a:avLst/>
+          </a:prstGeom>
+          <a:extLst>
+            <a:ext uri="{C572A759-6A51-4108-AA02-DFA0A04FC94B}">
+              <ma14:wrappingTextBoxFlag xmlns:ma14="http://schemas.microsoft.com/office/mac/drawingml/2011/main" val="0"/>
+            </a:ext>
+          </a:extLst>
+        </p:spPr>
+        <p:txBody>
+          <a:bodyPr/>
+          <a:lstStyle>
+            <a:lvl1pPr>
+              <a:defRPr sz="2000">
+                <a:solidFill>
+                  <a:srgbClr val="FFFFFF"/>
+                </a:solidFill>
+                <a:latin typeface="Calibri"/>
+                <a:ea typeface="Calibri"/>
+                <a:cs typeface="Calibri"/>
+              </a:defRPr>
+            </a:lvl1pPr>
+          </a:lstStyle>
+          <a:p>
+            <a:pPr algn="ctr"/>
+            <a:fld id="{F7021451-1387-4CA6-816F-3879F97B5CBC}" type="slidenum">
+              <a:rPr b="1" lang="en-US"/>
+              <a:t>49</a:t>
+            </a:fld>
+            <a:endParaRPr lang="en-US"/>
+          </a:p>
+        </p:txBody>
+      </p:sp>
+    </p:spTree>
+  </p:cSld>
+  <p:clrMapOvr>
+    <a:masterClrMapping/>
+  </p:clrMapOvr>
+</p:sld>
+</file>
+
+<file path=ppt/slides/slide5.xml><?xml version="1.0" encoding="utf-8"?>
+<p:sld xmlns:a="http://schemas.openxmlformats.org/drawingml/2006/main" xmlns:r="http://schemas.openxmlformats.org/officeDocument/2006/relationships" xmlns:p="http://schemas.openxmlformats.org/presentationml/2006/main">
+  <p:cSld name="Slide 5">
+    <p:spTree>
+      <p:nvGrpSpPr>
+        <p:cNvPr id="1" name=""/>
+        <p:cNvGrpSpPr/>
+        <p:nvPr/>
+      </p:nvGrpSpPr>
+      <p:grpSpPr>
+        <a:xfrm>
+          <a:off x="0" y="0"/>
+          <a:ext cx="0" cy="0"/>
+          <a:chOff x="0" y="0"/>
+          <a:chExt cx="0" cy="0"/>
+        </a:xfrm>
+      </p:grpSpPr>
+      <p:sp>
+        <p:nvSpPr>
+          <p:cNvPr id="2" name="Text 0"/>
+          <p:cNvSpPr/>
+          <p:nvPr/>
+        </p:nvSpPr>
+        <p:spPr>
+          <a:xfrm>
+            <a:off x="457200" y="713232"/>
+            <a:ext cx="11368735" cy="274320"/>
+          </a:xfrm>
+          <a:prstGeom prst="rect">
+            <a:avLst/>
+          </a:prstGeom>
+          <a:noFill/>
+          <a:ln/>
+        </p:spPr>
+        <p:txBody>
+          <a:bodyPr wrap="square" lIns="0" tIns="0" rIns="0" bIns="0" rtlCol="0" anchor="ctr"/>
+          <a:lstStyle/>
+          <a:p>
+            <a:pPr algn="r" indent="0" marL="0">
+              <a:buNone/>
+            </a:pPr>
+            <a:r>
+              <a:rPr lang="en-US" sz="1400" b="1" dirty="0">
+                <a:solidFill>
+                  <a:srgbClr val="1C3F6E"/>
+                </a:solidFill>
+                <a:latin typeface="Calibri" pitchFamily="34" charset="0"/>
+                <a:ea typeface="Calibri" pitchFamily="34" charset="-122"/>
+                <a:cs typeface="Calibri" pitchFamily="34" charset="-120"/>
+              </a:rPr>
+              <a:t>HOMEWORK CORRECTION</a:t>
+            </a:r>
+            <a:endParaRPr lang="en-US" sz="1400" dirty="0"/>
+          </a:p>
+        </p:txBody>
+      </p:sp>
+      <p:pic>
+        <p:nvPicPr>
+          <p:cNvPr id="3" name="Image 0" descr="/home/claude/f4/img/minesec_sheet.png">    </p:cNvPr>
+          <p:cNvPicPr>
+            <a:picLocks noChangeAspect="1"/>
+          </p:cNvPicPr>
+          <p:nvPr/>
+        </p:nvPicPr>
+        <p:blipFill>
+          <a:blip r:embed="rId1"/>
+          <a:stretch>
+            <a:fillRect/>
+          </a:stretch>
+        </p:blipFill>
+        <p:spPr>
+          <a:xfrm>
+            <a:off x="0" y="658368"/>
+            <a:ext cx="3840480" cy="5833872"/>
+          </a:xfrm>
+          <a:prstGeom prst="rect">
+            <a:avLst/>
+          </a:prstGeom>
+        </p:spPr>
+      </p:pic>
+      <p:sp>
+        <p:nvSpPr>
+          <p:cNvPr id="4" name="Text 1"/>
+          <p:cNvSpPr/>
+          <p:nvPr/>
+        </p:nvSpPr>
+        <p:spPr>
+          <a:xfrm>
+            <a:off x="4069080" y="1005840"/>
+            <a:ext cx="7802575" cy="731520"/>
+          </a:xfrm>
+          <a:prstGeom prst="rect">
+            <a:avLst/>
+          </a:prstGeom>
+          <a:noFill/>
+          <a:ln/>
+        </p:spPr>
+        <p:txBody>
+          <a:bodyPr wrap="square" lIns="0" tIns="0" rIns="0" bIns="0" rtlCol="0" anchor="ctr">
+            <a:normAutofit/>
+          </a:bodyPr>
+          <a:lstStyle/>
+          <a:p>
+            <a:pPr algn="ctr" indent="0" marL="0">
+              <a:buNone/>
+            </a:pPr>
+            <a:r>
+              <a:rPr lang="en-US" sz="3600" b="1" dirty="0">
+                <a:solidFill>
+                  <a:srgbClr val="990011"/>
+                </a:solidFill>
+                <a:latin typeface="Times New Roman" pitchFamily="34" charset="0"/>
+                <a:ea typeface="Times New Roman" pitchFamily="34" charset="-122"/>
+                <a:cs typeface="Times New Roman" pitchFamily="34" charset="-120"/>
+              </a:rPr>
+              <a:t>Correction: Possible Answer</a:t>
+            </a:r>
+            <a:endParaRPr lang="en-US" sz="3600" dirty="0"/>
+          </a:p>
+        </p:txBody>
+      </p:sp>
+      <p:sp>
+        <p:nvSpPr>
+          <p:cNvPr id="5" name="Text 2"/>
+          <p:cNvSpPr/>
+          <p:nvPr/>
+        </p:nvSpPr>
+        <p:spPr>
+          <a:xfrm>
+            <a:off x="4069080" y="1783080"/>
+            <a:ext cx="7802575" cy="4663440"/>
+          </a:xfrm>
+          <a:prstGeom prst="rect">
+            <a:avLst/>
+          </a:prstGeom>
+          <a:noFill/>
+          <a:ln/>
+        </p:spPr>
+        <p:txBody>
+          <a:bodyPr wrap="square" lIns="0" tIns="0" rIns="0" bIns="0" rtlCol="0" anchor="t"/>
+          <a:lstStyle/>
+          <a:p>
+            <a:pPr algn="l" indent="0" marL="0">
+              <a:spcAft>
+                <a:spcPts val="800"/>
+              </a:spcAft>
+              <a:buNone/>
+            </a:pPr>
+            <a:r>
+              <a:rPr lang="en-US" sz="4000" dirty="0">
+                <a:solidFill>
+                  <a:srgbClr val="111111"/>
+                </a:solidFill>
+                <a:latin typeface="Times New Roman" pitchFamily="34" charset="0"/>
+                <a:ea typeface="Times New Roman" pitchFamily="34" charset="-122"/>
+                <a:cs typeface="Times New Roman" pitchFamily="34" charset="-120"/>
+              </a:rPr>
+              <a:t>A good answer locates each vegetation type with grid references and directions and explains it by relief (forest on steep slopes), drainage (swamp on low wet land) or human activity (clearing near villages).</a:t>
+            </a:r>
+            <a:endParaRPr lang="en-US" sz="4000" dirty="0"/>
+          </a:p>
+        </p:txBody>
+      </p:sp>
+      <p:sp>
+        <p:nvSpPr>
+          <p:cNvPr id="25" name="Slide Number Placeholder 0"/>
+          <p:cNvSpPr>
+            <a:spLocks noGrp="1"/>
+          </p:cNvSpPr>
+          <p:nvPr>
+            <p:ph type="sldNum" sz="quarter" idx="4294967295"/>
+          </p:nvPr>
+        </p:nvSpPr>
+        <p:spPr>
+          <a:xfrm>
+            <a:off x="27432" y="91440"/>
+            <a:ext cx="585216" cy="475488"/>
+          </a:xfrm>
+          <a:prstGeom prst="rect">
+            <a:avLst/>
+          </a:prstGeom>
+          <a:extLst>
+            <a:ext uri="{C572A759-6A51-4108-AA02-DFA0A04FC94B}">
+              <ma14:wrappingTextBoxFlag xmlns:ma14="http://schemas.microsoft.com/office/mac/drawingml/2011/main" val="0"/>
+            </a:ext>
+          </a:extLst>
+        </p:spPr>
+        <p:txBody>
+          <a:bodyPr/>
+          <a:lstStyle>
+            <a:lvl1pPr>
+              <a:defRPr sz="2000">
+                <a:solidFill>
+                  <a:srgbClr val="FFFFFF"/>
+                </a:solidFill>
+                <a:latin typeface="Calibri"/>
+                <a:ea typeface="Calibri"/>
+                <a:cs typeface="Calibri"/>
+              </a:defRPr>
+            </a:lvl1pPr>
+          </a:lstStyle>
+          <a:p>
+            <a:pPr algn="ctr"/>
+            <a:fld id="{F7021451-1387-4CA6-816F-3879F97B5CBC}" type="slidenum">
+              <a:rPr b="1" lang="en-US"/>
+              <a:t>5</a:t>
+            </a:fld>
+            <a:endParaRPr lang="en-US"/>
+          </a:p>
+        </p:txBody>
+      </p:sp>
+    </p:spTree>
+  </p:cSld>
+  <p:clrMapOvr>
+    <a:masterClrMapping/>
+  </p:clrMapOvr>
+</p:sld>
+</file>
+
+<file path=ppt/slides/slide50.xml><?xml version="1.0" encoding="utf-8"?>
+<p:sld xmlns:a="http://schemas.openxmlformats.org/drawingml/2006/main" xmlns:r="http://schemas.openxmlformats.org/officeDocument/2006/relationships" xmlns:p="http://schemas.openxmlformats.org/presentationml/2006/main">
+  <p:cSld name="Slide 50">
+    <p:spTree>
+      <p:nvGrpSpPr>
+        <p:cNvPr id="1" name=""/>
+        <p:cNvGrpSpPr/>
+        <p:nvPr/>
+      </p:nvGrpSpPr>
+      <p:grpSpPr>
+        <a:xfrm>
+          <a:off x="0" y="0"/>
+          <a:ext cx="0" cy="0"/>
+          <a:chOff x="0" y="0"/>
+          <a:chExt cx="0" cy="0"/>
+        </a:xfrm>
+      </p:grpSpPr>
+      <p:sp>
+        <p:nvSpPr>
+          <p:cNvPr id="2" name="Text 0"/>
+          <p:cNvSpPr/>
+          <p:nvPr/>
+        </p:nvSpPr>
+        <p:spPr>
+          <a:xfrm>
+            <a:off x="457200" y="713232"/>
+            <a:ext cx="11368735" cy="274320"/>
+          </a:xfrm>
+          <a:prstGeom prst="rect">
+            <a:avLst/>
+          </a:prstGeom>
+          <a:noFill/>
+          <a:ln/>
+        </p:spPr>
+        <p:txBody>
+          <a:bodyPr wrap="square" lIns="0" tIns="0" rIns="0" bIns="0" rtlCol="0" anchor="ctr"/>
+          <a:lstStyle/>
+          <a:p>
+            <a:pPr algn="r" indent="0" marL="0">
+              <a:buNone/>
+            </a:pPr>
+            <a:r>
+              <a:rPr lang="en-US" sz="1400" b="1" dirty="0">
+                <a:solidFill>
+                  <a:srgbClr val="1C3F6E"/>
+                </a:solidFill>
+                <a:latin typeface="Calibri" pitchFamily="34" charset="0"/>
+                <a:ea typeface="Calibri" pitchFamily="34" charset="-122"/>
+                <a:cs typeface="Calibri" pitchFamily="34" charset="-120"/>
+              </a:rPr>
               <a:t>BILINGUAL GAME</a:t>
             </a:r>
             <a:endParaRPr lang="en-US" sz="1400" dirty="0"/>
@@ -16674,7 +18253,7 @@
       </p:sp>
       <p:graphicFrame>
         <p:nvGraphicFramePr>
-          <p:cNvPr id="48" name="Table 0"/>
+          <p:cNvPr id="51" name="Table 0"/>
           <p:cNvGraphicFramePr>
             <a:graphicFrameLocks noGrp="1"/>
           </p:cNvGraphicFramePr>
@@ -17710,7 +19289,7 @@
             <a:pPr algn="ctr"/>
             <a:fld id="{F7021451-1387-4CA6-816F-3879F97B5CBC}" type="slidenum">
               <a:rPr b="1" lang="en-US"/>
-              <a:t>47</a:t>
+              <a:t>50</a:t>
             </a:fld>
             <a:endParaRPr lang="en-US"/>
           </a:p>
@@ -17724,9 +19303,9 @@
 </p:sld>
 </file>
 
-<file path=ppt/slides/slide48.xml><?xml version="1.0" encoding="utf-8"?>
+<file path=ppt/slides/slide51.xml><?xml version="1.0" encoding="utf-8"?>
 <p:sld xmlns:a="http://schemas.openxmlformats.org/drawingml/2006/main" xmlns:r="http://schemas.openxmlformats.org/officeDocument/2006/relationships" xmlns:p="http://schemas.openxmlformats.org/presentationml/2006/main">
-  <p:cSld name="Slide 48">
+  <p:cSld name="Slide 51">
     <p:spTree>
       <p:nvGrpSpPr>
         <p:cNvPr id="1" name=""/>
@@ -17821,7 +19400,7 @@
       </p:sp>
       <p:graphicFrame>
         <p:nvGraphicFramePr>
-          <p:cNvPr id="49" name="Table 0"/>
+          <p:cNvPr id="52" name="Table 0"/>
           <p:cNvGraphicFramePr>
             <a:graphicFrameLocks noGrp="1"/>
           </p:cNvGraphicFramePr>
@@ -18443,7 +20022,7 @@
             <a:pPr algn="ctr"/>
             <a:fld id="{F7021451-1387-4CA6-816F-3879F97B5CBC}" type="slidenum">
               <a:rPr b="1" lang="en-US"/>
-              <a:t>48</a:t>
+              <a:t>51</a:t>
             </a:fld>
             <a:endParaRPr lang="en-US"/>
           </a:p>
@@ -18457,9 +20036,9 @@
 </p:sld>
 </file>
 
-<file path=ppt/slides/slide49.xml><?xml version="1.0" encoding="utf-8"?>
+<file path=ppt/slides/slide52.xml><?xml version="1.0" encoding="utf-8"?>
 <p:sld xmlns:a="http://schemas.openxmlformats.org/drawingml/2006/main" xmlns:r="http://schemas.openxmlformats.org/officeDocument/2006/relationships" xmlns:p="http://schemas.openxmlformats.org/presentationml/2006/main">
-  <p:cSld name="Slide 49">
+  <p:cSld name="Slide 52">
     <p:spTree>
       <p:nvGrpSpPr>
         <p:cNvPr id="1" name=""/>
@@ -18554,7 +20133,7 @@
       </p:sp>
       <p:graphicFrame>
         <p:nvGraphicFramePr>
-          <p:cNvPr id="50" name="Table 0"/>
+          <p:cNvPr id="53" name="Table 0"/>
           <p:cNvGraphicFramePr>
             <a:graphicFrameLocks noGrp="1"/>
           </p:cNvGraphicFramePr>
@@ -18664,7 +20243,7 @@
                           <a:ea typeface="Calibri" pitchFamily="34" charset="-122"/>
                           <a:cs typeface="Calibri" pitchFamily="34" charset="-120"/>
                         </a:rPr>
-                        <a:t>DEFINITIONS; Major Fishing Grounds; Importance and Conservation.</a:t>
+                        <a:t>DEFINITIONS; The Fishing Grounds; Reasons; Importance; Conservation.</a:t>
                       </a:r>
                       <a:endParaRPr lang="en-US" sz="1600" dirty="0">
                         <a:latin typeface="Calibri" charset="0"/>
@@ -19314,7 +20893,7 @@
             <a:pPr algn="ctr"/>
             <a:fld id="{F7021451-1387-4CA6-816F-3879F97B5CBC}" type="slidenum">
               <a:rPr b="1" lang="en-US"/>
-              <a:t>49</a:t>
+              <a:t>52</a:t>
             </a:fld>
             <a:endParaRPr lang="en-US"/>
           </a:p>
@@ -19328,9 +20907,9 @@
 </p:sld>
 </file>
 
-<file path=ppt/slides/slide5.xml><?xml version="1.0" encoding="utf-8"?>
+<file path=ppt/slides/slide53.xml><?xml version="1.0" encoding="utf-8"?>
 <p:sld xmlns:a="http://schemas.openxmlformats.org/drawingml/2006/main" xmlns:r="http://schemas.openxmlformats.org/officeDocument/2006/relationships" xmlns:p="http://schemas.openxmlformats.org/presentationml/2006/main">
-  <p:cSld name="Slide 5">
+  <p:cSld name="Slide 53">
     <p:spTree>
       <p:nvGrpSpPr>
         <p:cNvPr id="1" name=""/>
@@ -19378,7 +20957,7 @@
                 <a:ea typeface="Calibri" pitchFamily="34" charset="-122"/>
                 <a:cs typeface="Calibri" pitchFamily="34" charset="-120"/>
               </a:rPr>
-              <a:t>HOMEWORK CORRECTION</a:t>
+              <a:t>TEACHER'S NOTE</a:t>
             </a:r>
             <a:endParaRPr lang="en-US" sz="1400" dirty="0"/>
           </a:p>
@@ -19401,7 +20980,7 @@
         <p:spPr>
           <a:xfrm>
             <a:off x="0" y="658368"/>
-            <a:ext cx="3840480" cy="5833872"/>
+            <a:ext cx="5120640" cy="5833872"/>
           </a:xfrm>
           <a:prstGeom prst="rect">
             <a:avLst/>
@@ -19416,8 +20995,8 @@
         </p:nvSpPr>
         <p:spPr>
           <a:xfrm>
-            <a:off x="4069080" y="1005840"/>
-            <a:ext cx="7802575" cy="731520"/>
+            <a:off x="5349240" y="1005840"/>
+            <a:ext cx="6522415" cy="731520"/>
           </a:xfrm>
           <a:prstGeom prst="rect">
             <a:avLst/>
@@ -19443,7 +21022,7 @@
                 <a:ea typeface="Times New Roman" pitchFamily="34" charset="-122"/>
                 <a:cs typeface="Times New Roman" pitchFamily="34" charset="-120"/>
               </a:rPr>
-              <a:t>Correction: Possible Answer</a:t>
+              <a:t>Teacher's Note</a:t>
             </a:r>
             <a:endParaRPr lang="en-US" sz="3600" dirty="0"/>
           </a:p>
@@ -19457,8 +21036,8 @@
         </p:nvSpPr>
         <p:spPr>
           <a:xfrm>
-            <a:off x="4069080" y="1783080"/>
-            <a:ext cx="7802575" cy="4663440"/>
+            <a:off x="5349240" y="1783080"/>
+            <a:ext cx="6522415" cy="4663440"/>
           </a:xfrm>
           <a:prstGeom prst="rect">
             <a:avLst/>
@@ -19470,24 +21049,130 @@
           <a:bodyPr wrap="square" lIns="0" tIns="0" rIns="0" bIns="0" rtlCol="0" anchor="t"/>
           <a:lstStyle/>
           <a:p>
-            <a:pPr algn="l" indent="0" marL="0">
+            <a:pPr algn="l" marL="342900" indent="-342900">
               <a:spcAft>
                 <a:spcPts val="800"/>
               </a:spcAft>
-              <a:buNone/>
+              <a:buSzPct val="100000"/>
+              <a:buChar char="•"/>
             </a:pPr>
             <a:r>
-              <a:rPr lang="en-US" sz="4000" dirty="0">
+              <a:rPr lang="en-US" sz="2000" dirty="0">
                 <a:solidFill>
                   <a:srgbClr val="111111"/>
                 </a:solidFill>
-                <a:latin typeface="Times New Roman" pitchFamily="34" charset="0"/>
-                <a:ea typeface="Times New Roman" pitchFamily="34" charset="-122"/>
-                <a:cs typeface="Times New Roman" pitchFamily="34" charset="-120"/>
+                <a:latin typeface="Calibri" pitchFamily="34" charset="0"/>
+                <a:ea typeface="Calibri" pitchFamily="34" charset="-122"/>
+                <a:cs typeface="Calibri" pitchFamily="34" charset="-120"/>
               </a:rPr>
-              <a:t>A good answer locates each vegetation type with grid references and directions and explains it by relief (forest on steep slopes), drainage (swamp on low wet land) or human activity (clearing near villages).</a:t>
-            </a:r>
-            <a:endParaRPr lang="en-US" sz="4000" dirty="0"/>
+              <a:t>Timing: Homework correction, plan, objectives 8 min | Recall, situation, action 10 min | 5 activities 30 min | Board summary (copying) 30 min | Evaluation, remediation 10 min | Homework, next lesson 5 min | Logbook 7 min</a:t>
+            </a:r>
+            <a:endParaRPr lang="en-US" sz="2000" dirty="0"/>
+          </a:p>
+          <a:p>
+            <a:pPr algn="l" marL="342900" indent="-342900">
+              <a:spcAft>
+                <a:spcPts val="800"/>
+              </a:spcAft>
+              <a:buSzPct val="100000"/>
+              <a:buChar char="•"/>
+            </a:pPr>
+            <a:r>
+              <a:rPr lang="en-US" sz="2000" dirty="0">
+                <a:solidFill>
+                  <a:srgbClr val="111111"/>
+                </a:solidFill>
+                <a:latin typeface="Calibri" pitchFamily="34" charset="0"/>
+                <a:ea typeface="Calibri" pitchFamily="34" charset="-122"/>
+                <a:cs typeface="Calibri" pitchFamily="34" charset="-120"/>
+              </a:rPr>
+              <a:t>Without the projector (Activity 1): name local fishing places.</a:t>
+            </a:r>
+            <a:endParaRPr lang="en-US" sz="2000" dirty="0"/>
+          </a:p>
+          <a:p>
+            <a:pPr algn="l" marL="342900" indent="-342900">
+              <a:spcAft>
+                <a:spcPts val="800"/>
+              </a:spcAft>
+              <a:buSzPct val="100000"/>
+              <a:buChar char="•"/>
+            </a:pPr>
+            <a:r>
+              <a:rPr lang="en-US" sz="2000" dirty="0">
+                <a:solidFill>
+                  <a:srgbClr val="111111"/>
+                </a:solidFill>
+                <a:latin typeface="Calibri" pitchFamily="34" charset="0"/>
+                <a:ea typeface="Calibri" pitchFamily="34" charset="-122"/>
+                <a:cs typeface="Calibri" pitchFamily="34" charset="-120"/>
+              </a:rPr>
+              <a:t>Without the projector (Activity 2): use the atlas.</a:t>
+            </a:r>
+            <a:endParaRPr lang="en-US" sz="2000" dirty="0"/>
+          </a:p>
+          <a:p>
+            <a:pPr algn="l" marL="342900" indent="-342900">
+              <a:spcAft>
+                <a:spcPts val="800"/>
+              </a:spcAft>
+              <a:buSzPct val="100000"/>
+              <a:buChar char="•"/>
+            </a:pPr>
+            <a:r>
+              <a:rPr lang="en-US" sz="2000" dirty="0">
+                <a:solidFill>
+                  <a:srgbClr val="111111"/>
+                </a:solidFill>
+                <a:latin typeface="Calibri" pitchFamily="34" charset="0"/>
+                <a:ea typeface="Calibri" pitchFamily="34" charset="-122"/>
+                <a:cs typeface="Calibri" pitchFamily="34" charset="-120"/>
+              </a:rPr>
+              <a:t>Without the projector (Activity 3): discuss.</a:t>
+            </a:r>
+            <a:endParaRPr lang="en-US" sz="2000" dirty="0"/>
+          </a:p>
+          <a:p>
+            <a:pPr algn="l" marL="342900" indent="-342900">
+              <a:spcAft>
+                <a:spcPts val="800"/>
+              </a:spcAft>
+              <a:buSzPct val="100000"/>
+              <a:buChar char="•"/>
+            </a:pPr>
+            <a:r>
+              <a:rPr lang="en-US" sz="2000" dirty="0">
+                <a:solidFill>
+                  <a:srgbClr val="111111"/>
+                </a:solidFill>
+                <a:latin typeface="Calibri" pitchFamily="34" charset="0"/>
+                <a:ea typeface="Calibri" pitchFamily="34" charset="-122"/>
+                <a:cs typeface="Calibri" pitchFamily="34" charset="-120"/>
+              </a:rPr>
+              <a:t>Without the projector (Activity 4): discuss.</a:t>
+            </a:r>
+            <a:endParaRPr lang="en-US" sz="2000" dirty="0"/>
+          </a:p>
+          <a:p>
+            <a:pPr algn="l" marL="342900" indent="-342900">
+              <a:spcAft>
+                <a:spcPts val="800"/>
+              </a:spcAft>
+              <a:buSzPct val="100000"/>
+              <a:buChar char="•"/>
+            </a:pPr>
+            <a:r>
+              <a:rPr lang="en-US" sz="2000" dirty="0">
+                <a:solidFill>
+                  <a:srgbClr val="111111"/>
+                </a:solidFill>
+                <a:latin typeface="Calibri" pitchFamily="34" charset="0"/>
+                <a:ea typeface="Calibri" pitchFamily="34" charset="-122"/>
+                <a:cs typeface="Calibri" pitchFamily="34" charset="-120"/>
+              </a:rPr>
+              <a:t>Without the projector (Activity 5): list measures.</a:t>
+            </a:r>
+            <a:endParaRPr lang="en-US" sz="2000" dirty="0"/>
           </a:p>
         </p:txBody>
       </p:sp>
@@ -19533,7 +21218,7 @@
             <a:pPr algn="ctr"/>
             <a:fld id="{F7021451-1387-4CA6-816F-3879F97B5CBC}" type="slidenum">
               <a:rPr b="1" lang="en-US"/>
-              <a:t>5</a:t>
+              <a:t>53</a:t>
             </a:fld>
             <a:endParaRPr lang="en-US"/>
           </a:p>
@@ -19547,9 +21232,9 @@
 </p:sld>
 </file>
 
-<file path=ppt/slides/slide50.xml><?xml version="1.0" encoding="utf-8"?>
+<file path=ppt/slides/slide54.xml><?xml version="1.0" encoding="utf-8"?>
 <p:sld xmlns:a="http://schemas.openxmlformats.org/drawingml/2006/main" xmlns:r="http://schemas.openxmlformats.org/officeDocument/2006/relationships" xmlns:p="http://schemas.openxmlformats.org/presentationml/2006/main">
-  <p:cSld name="Slide 50">
+  <p:cSld name="Slide 54">
     <p:spTree>
       <p:nvGrpSpPr>
         <p:cNvPr id="1" name=""/>
@@ -19597,7 +21282,7 @@
                 <a:ea typeface="Calibri" pitchFamily="34" charset="-122"/>
                 <a:cs typeface="Calibri" pitchFamily="34" charset="-120"/>
               </a:rPr>
-              <a:t>TEACHER'S NOTE</a:t>
+              <a:t>REFERENCES</a:t>
             </a:r>
             <a:endParaRPr lang="en-US" sz="1400" dirty="0"/>
           </a:p>
@@ -19662,7 +21347,7 @@
                 <a:ea typeface="Times New Roman" pitchFamily="34" charset="-122"/>
                 <a:cs typeface="Times New Roman" pitchFamily="34" charset="-120"/>
               </a:rPr>
-              <a:t>Teacher's Note</a:t>
+              <a:t>References</a:t>
             </a:r>
             <a:endParaRPr lang="en-US" sz="3600" dirty="0"/>
           </a:p>
@@ -19697,7 +21382,7 @@
               <a:buChar char="•"/>
             </a:pPr>
             <a:r>
-              <a:rPr lang="en-US" sz="2000" dirty="0">
+              <a:rPr lang="en-US" sz="1800" dirty="0">
                 <a:solidFill>
                   <a:srgbClr val="111111"/>
                 </a:solidFill>
@@ -19705,9 +21390,9 @@
                 <a:ea typeface="Calibri" pitchFamily="34" charset="-122"/>
                 <a:cs typeface="Calibri" pitchFamily="34" charset="-120"/>
               </a:rPr>
-              <a:t>Timing: Homework correction, plan, objectives 8 min | Recall, situation, action 10 min | 5 activities 30 min | Board summary (copying) 30 min | Evaluation, remediation 10 min | Homework, next lesson 5 min | Logbook 7 min</a:t>
-            </a:r>
-            <a:endParaRPr lang="en-US" sz="2000" dirty="0"/>
+              <a:t>Geography Syllabus, Forms I–V, MINESEC (2023) — Form 4, Module II: Development and the Management of Primary Resources.</a:t>
+            </a:r>
+            <a:endParaRPr lang="en-US" sz="1800" dirty="0"/>
           </a:p>
           <a:p>
             <a:pPr algn="l" marL="342900" indent="-342900">
@@ -19718,7 +21403,7 @@
               <a:buChar char="•"/>
             </a:pPr>
             <a:r>
-              <a:rPr lang="en-US" sz="2000" dirty="0">
+              <a:rPr lang="en-US" sz="1800" dirty="0">
                 <a:solidFill>
                   <a:srgbClr val="111111"/>
                 </a:solidFill>
@@ -19726,9 +21411,9 @@
                 <a:ea typeface="Calibri" pitchFamily="34" charset="-122"/>
                 <a:cs typeface="Calibri" pitchFamily="34" charset="-120"/>
               </a:rPr>
-              <a:t>Without the projector (Activity 1): name local fishing places.</a:t>
-            </a:r>
-            <a:endParaRPr lang="en-US" sz="2000" dirty="0"/>
+              <a:t>Photo, Activity 1: “Fishermen, Lake Tana” by A.Davey, CC BY 2.0, via Flickr (https://www.flickr.com/photos/40595948@N00/2260748777)</a:t>
+            </a:r>
+            <a:endParaRPr lang="en-US" sz="1800" dirty="0"/>
           </a:p>
           <a:p>
             <a:pPr algn="l" marL="342900" indent="-342900">
@@ -19739,7 +21424,7 @@
               <a:buChar char="•"/>
             </a:pPr>
             <a:r>
-              <a:rPr lang="en-US" sz="2000" dirty="0">
+              <a:rPr lang="en-US" sz="1800" dirty="0">
                 <a:solidFill>
                   <a:srgbClr val="111111"/>
                 </a:solidFill>
@@ -19747,9 +21432,9 @@
                 <a:ea typeface="Calibri" pitchFamily="34" charset="-122"/>
                 <a:cs typeface="Calibri" pitchFamily="34" charset="-120"/>
               </a:rPr>
-              <a:t>Without the projector (Activity 2): use the atlas.</a:t>
-            </a:r>
-            <a:endParaRPr lang="en-US" sz="2000" dirty="0"/>
+              <a:t>Photo, Activity 4: “Kenyan food, farming and landscapes” by CGIAR Climate, CC BY-NC-SA 2.0, via Flickr (https://www.flickr.com/photos/55227776@N04/14310899853)</a:t>
+            </a:r>
+            <a:endParaRPr lang="en-US" sz="1800" dirty="0"/>
           </a:p>
           <a:p>
             <a:pPr algn="l" marL="342900" indent="-342900">
@@ -19760,7 +21445,7 @@
               <a:buChar char="•"/>
             </a:pPr>
             <a:r>
-              <a:rPr lang="en-US" sz="2000" dirty="0">
+              <a:rPr lang="en-US" sz="1800" dirty="0">
                 <a:solidFill>
                   <a:srgbClr val="111111"/>
                 </a:solidFill>
@@ -19768,9 +21453,9 @@
                 <a:ea typeface="Calibri" pitchFamily="34" charset="-122"/>
                 <a:cs typeface="Calibri" pitchFamily="34" charset="-120"/>
               </a:rPr>
-              <a:t>Without the projector (Activity 3): discuss.</a:t>
-            </a:r>
-            <a:endParaRPr lang="en-US" sz="2000" dirty="0"/>
+              <a:t>Photo, Activity 5: “Empty beaches” by ludwig.troller, CC BY-NC 2.0, via Flickr (https://www.flickr.com/photos/124845120@N03/14285811155)</a:t>
+            </a:r>
+            <a:endParaRPr lang="en-US" sz="1800" dirty="0"/>
           </a:p>
           <a:p>
             <a:pPr algn="l" marL="342900" indent="-342900">
@@ -19781,7 +21466,7 @@
               <a:buChar char="•"/>
             </a:pPr>
             <a:r>
-              <a:rPr lang="en-US" sz="2000" dirty="0">
+              <a:rPr lang="en-US" sz="1800" dirty="0">
                 <a:solidFill>
                   <a:srgbClr val="111111"/>
                 </a:solidFill>
@@ -19789,30 +21474,9 @@
                 <a:ea typeface="Calibri" pitchFamily="34" charset="-122"/>
                 <a:cs typeface="Calibri" pitchFamily="34" charset="-120"/>
               </a:rPr>
-              <a:t>Without the projector (Activity 4): discuss.</a:t>
-            </a:r>
-            <a:endParaRPr lang="en-US" sz="2000" dirty="0"/>
-          </a:p>
-          <a:p>
-            <a:pPr algn="l" marL="342900" indent="-342900">
-              <a:spcAft>
-                <a:spcPts val="800"/>
-              </a:spcAft>
-              <a:buSzPct val="100000"/>
-              <a:buChar char="•"/>
-            </a:pPr>
-            <a:r>
-              <a:rPr lang="en-US" sz="2000" dirty="0">
-                <a:solidFill>
-                  <a:srgbClr val="111111"/>
-                </a:solidFill>
-                <a:latin typeface="Calibri" pitchFamily="34" charset="0"/>
-                <a:ea typeface="Calibri" pitchFamily="34" charset="-122"/>
-                <a:cs typeface="Calibri" pitchFamily="34" charset="-120"/>
-              </a:rPr>
-              <a:t>Without the projector (Activity 5): list measures.</a:t>
-            </a:r>
-            <a:endParaRPr lang="en-US" sz="2000" dirty="0"/>
+              <a:t>Diagrams and animations: drawn for this lesson (Geography Department).</a:t>
+            </a:r>
+            <a:endParaRPr lang="en-US" sz="1800" dirty="0"/>
           </a:p>
         </p:txBody>
       </p:sp>
@@ -19858,311 +21522,7 @@
             <a:pPr algn="ctr"/>
             <a:fld id="{F7021451-1387-4CA6-816F-3879F97B5CBC}" type="slidenum">
               <a:rPr b="1" lang="en-US"/>
-              <a:t>50</a:t>
-            </a:fld>
-            <a:endParaRPr lang="en-US"/>
-          </a:p>
-        </p:txBody>
-      </p:sp>
-    </p:spTree>
-  </p:cSld>
-  <p:clrMapOvr>
-    <a:masterClrMapping/>
-  </p:clrMapOvr>
-</p:sld>
-</file>
-
-<file path=ppt/slides/slide51.xml><?xml version="1.0" encoding="utf-8"?>
-<p:sld xmlns:a="http://schemas.openxmlformats.org/drawingml/2006/main" xmlns:r="http://schemas.openxmlformats.org/officeDocument/2006/relationships" xmlns:p="http://schemas.openxmlformats.org/presentationml/2006/main">
-  <p:cSld name="Slide 51">
-    <p:spTree>
-      <p:nvGrpSpPr>
-        <p:cNvPr id="1" name=""/>
-        <p:cNvGrpSpPr/>
-        <p:nvPr/>
-      </p:nvGrpSpPr>
-      <p:grpSpPr>
-        <a:xfrm>
-          <a:off x="0" y="0"/>
-          <a:ext cx="0" cy="0"/>
-          <a:chOff x="0" y="0"/>
-          <a:chExt cx="0" cy="0"/>
-        </a:xfrm>
-      </p:grpSpPr>
-      <p:sp>
-        <p:nvSpPr>
-          <p:cNvPr id="2" name="Text 0"/>
-          <p:cNvSpPr/>
-          <p:nvPr/>
-        </p:nvSpPr>
-        <p:spPr>
-          <a:xfrm>
-            <a:off x="457200" y="713232"/>
-            <a:ext cx="11368735" cy="274320"/>
-          </a:xfrm>
-          <a:prstGeom prst="rect">
-            <a:avLst/>
-          </a:prstGeom>
-          <a:noFill/>
-          <a:ln/>
-        </p:spPr>
-        <p:txBody>
-          <a:bodyPr wrap="square" lIns="0" tIns="0" rIns="0" bIns="0" rtlCol="0" anchor="ctr"/>
-          <a:lstStyle/>
-          <a:p>
-            <a:pPr algn="r" indent="0" marL="0">
-              <a:buNone/>
-            </a:pPr>
-            <a:r>
-              <a:rPr lang="en-US" sz="1400" b="1" dirty="0">
-                <a:solidFill>
-                  <a:srgbClr val="1C3F6E"/>
-                </a:solidFill>
-                <a:latin typeface="Calibri" pitchFamily="34" charset="0"/>
-                <a:ea typeface="Calibri" pitchFamily="34" charset="-122"/>
-                <a:cs typeface="Calibri" pitchFamily="34" charset="-120"/>
-              </a:rPr>
-              <a:t>REFERENCES</a:t>
-            </a:r>
-            <a:endParaRPr lang="en-US" sz="1400" dirty="0"/>
-          </a:p>
-        </p:txBody>
-      </p:sp>
-      <p:pic>
-        <p:nvPicPr>
-          <p:cNvPr id="3" name="Image 0" descr="/home/claude/f4/img/minesec_sheet.png">    </p:cNvPr>
-          <p:cNvPicPr>
-            <a:picLocks noChangeAspect="1"/>
-          </p:cNvPicPr>
-          <p:nvPr/>
-        </p:nvPicPr>
-        <p:blipFill>
-          <a:blip r:embed="rId1"/>
-          <a:stretch>
-            <a:fillRect/>
-          </a:stretch>
-        </p:blipFill>
-        <p:spPr>
-          <a:xfrm>
-            <a:off x="0" y="658368"/>
-            <a:ext cx="5120640" cy="5833872"/>
-          </a:xfrm>
-          <a:prstGeom prst="rect">
-            <a:avLst/>
-          </a:prstGeom>
-        </p:spPr>
-      </p:pic>
-      <p:sp>
-        <p:nvSpPr>
-          <p:cNvPr id="4" name="Text 1"/>
-          <p:cNvSpPr/>
-          <p:nvPr/>
-        </p:nvSpPr>
-        <p:spPr>
-          <a:xfrm>
-            <a:off x="5349240" y="1005840"/>
-            <a:ext cx="6522415" cy="731520"/>
-          </a:xfrm>
-          <a:prstGeom prst="rect">
-            <a:avLst/>
-          </a:prstGeom>
-          <a:noFill/>
-          <a:ln/>
-        </p:spPr>
-        <p:txBody>
-          <a:bodyPr wrap="square" lIns="0" tIns="0" rIns="0" bIns="0" rtlCol="0" anchor="ctr">
-            <a:normAutofit/>
-          </a:bodyPr>
-          <a:lstStyle/>
-          <a:p>
-            <a:pPr algn="ctr" indent="0" marL="0">
-              <a:buNone/>
-            </a:pPr>
-            <a:r>
-              <a:rPr lang="en-US" sz="3600" b="1" dirty="0">
-                <a:solidFill>
-                  <a:srgbClr val="990011"/>
-                </a:solidFill>
-                <a:latin typeface="Times New Roman" pitchFamily="34" charset="0"/>
-                <a:ea typeface="Times New Roman" pitchFamily="34" charset="-122"/>
-                <a:cs typeface="Times New Roman" pitchFamily="34" charset="-120"/>
-              </a:rPr>
-              <a:t>References</a:t>
-            </a:r>
-            <a:endParaRPr lang="en-US" sz="3600" dirty="0"/>
-          </a:p>
-        </p:txBody>
-      </p:sp>
-      <p:sp>
-        <p:nvSpPr>
-          <p:cNvPr id="5" name="Text 2"/>
-          <p:cNvSpPr/>
-          <p:nvPr/>
-        </p:nvSpPr>
-        <p:spPr>
-          <a:xfrm>
-            <a:off x="5349240" y="1783080"/>
-            <a:ext cx="6522415" cy="4663440"/>
-          </a:xfrm>
-          <a:prstGeom prst="rect">
-            <a:avLst/>
-          </a:prstGeom>
-          <a:noFill/>
-          <a:ln/>
-        </p:spPr>
-        <p:txBody>
-          <a:bodyPr wrap="square" lIns="0" tIns="0" rIns="0" bIns="0" rtlCol="0" anchor="t"/>
-          <a:lstStyle/>
-          <a:p>
-            <a:pPr algn="l" marL="342900" indent="-342900">
-              <a:spcAft>
-                <a:spcPts val="800"/>
-              </a:spcAft>
-              <a:buSzPct val="100000"/>
-              <a:buChar char="•"/>
-            </a:pPr>
-            <a:r>
-              <a:rPr lang="en-US" sz="1800" dirty="0">
-                <a:solidFill>
-                  <a:srgbClr val="111111"/>
-                </a:solidFill>
-                <a:latin typeface="Calibri" pitchFamily="34" charset="0"/>
-                <a:ea typeface="Calibri" pitchFamily="34" charset="-122"/>
-                <a:cs typeface="Calibri" pitchFamily="34" charset="-120"/>
-              </a:rPr>
-              <a:t>Geography Syllabus, Forms I–V, MINESEC (2023) — Form 4, Module II: Development and the Management of Primary Resources.</a:t>
-            </a:r>
-            <a:endParaRPr lang="en-US" sz="1800" dirty="0"/>
-          </a:p>
-          <a:p>
-            <a:pPr algn="l" marL="342900" indent="-342900">
-              <a:spcAft>
-                <a:spcPts val="800"/>
-              </a:spcAft>
-              <a:buSzPct val="100000"/>
-              <a:buChar char="•"/>
-            </a:pPr>
-            <a:r>
-              <a:rPr lang="en-US" sz="1800" dirty="0">
-                <a:solidFill>
-                  <a:srgbClr val="111111"/>
-                </a:solidFill>
-                <a:latin typeface="Calibri" pitchFamily="34" charset="0"/>
-                <a:ea typeface="Calibri" pitchFamily="34" charset="-122"/>
-                <a:cs typeface="Calibri" pitchFamily="34" charset="-120"/>
-              </a:rPr>
-              <a:t>Photo, Activity 1: “Fishermen, Lake Tana” by A.Davey, CC BY 2.0, via Flickr (https://www.flickr.com/photos/40595948@N00/2260748777)</a:t>
-            </a:r>
-            <a:endParaRPr lang="en-US" sz="1800" dirty="0"/>
-          </a:p>
-          <a:p>
-            <a:pPr algn="l" marL="342900" indent="-342900">
-              <a:spcAft>
-                <a:spcPts val="800"/>
-              </a:spcAft>
-              <a:buSzPct val="100000"/>
-              <a:buChar char="•"/>
-            </a:pPr>
-            <a:r>
-              <a:rPr lang="en-US" sz="1800" dirty="0">
-                <a:solidFill>
-                  <a:srgbClr val="111111"/>
-                </a:solidFill>
-                <a:latin typeface="Calibri" pitchFamily="34" charset="0"/>
-                <a:ea typeface="Calibri" pitchFamily="34" charset="-122"/>
-                <a:cs typeface="Calibri" pitchFamily="34" charset="-120"/>
-              </a:rPr>
-              <a:t>Photo, Activity 4: “Kenyan food, farming and landscapes” by CGIAR Climate, CC BY-NC-SA 2.0, via Flickr (https://www.flickr.com/photos/55227776@N04/14310899853)</a:t>
-            </a:r>
-            <a:endParaRPr lang="en-US" sz="1800" dirty="0"/>
-          </a:p>
-          <a:p>
-            <a:pPr algn="l" marL="342900" indent="-342900">
-              <a:spcAft>
-                <a:spcPts val="800"/>
-              </a:spcAft>
-              <a:buSzPct val="100000"/>
-              <a:buChar char="•"/>
-            </a:pPr>
-            <a:r>
-              <a:rPr lang="en-US" sz="1800" dirty="0">
-                <a:solidFill>
-                  <a:srgbClr val="111111"/>
-                </a:solidFill>
-                <a:latin typeface="Calibri" pitchFamily="34" charset="0"/>
-                <a:ea typeface="Calibri" pitchFamily="34" charset="-122"/>
-                <a:cs typeface="Calibri" pitchFamily="34" charset="-120"/>
-              </a:rPr>
-              <a:t>Photo, Activity 5: “Empty beaches” by ludwig.troller, CC BY-NC 2.0, via Flickr (https://www.flickr.com/photos/124845120@N03/14285811155)</a:t>
-            </a:r>
-            <a:endParaRPr lang="en-US" sz="1800" dirty="0"/>
-          </a:p>
-          <a:p>
-            <a:pPr algn="l" marL="342900" indent="-342900">
-              <a:spcAft>
-                <a:spcPts val="800"/>
-              </a:spcAft>
-              <a:buSzPct val="100000"/>
-              <a:buChar char="•"/>
-            </a:pPr>
-            <a:r>
-              <a:rPr lang="en-US" sz="1800" dirty="0">
-                <a:solidFill>
-                  <a:srgbClr val="111111"/>
-                </a:solidFill>
-                <a:latin typeface="Calibri" pitchFamily="34" charset="0"/>
-                <a:ea typeface="Calibri" pitchFamily="34" charset="-122"/>
-                <a:cs typeface="Calibri" pitchFamily="34" charset="-120"/>
-              </a:rPr>
-              <a:t>Diagrams and animations: drawn for this lesson (Geography Department).</a:t>
-            </a:r>
-            <a:endParaRPr lang="en-US" sz="1800" dirty="0"/>
-          </a:p>
-        </p:txBody>
-      </p:sp>
-      <p:sp>
-        <p:nvSpPr>
-          <p:cNvPr id="25" name="Slide Number Placeholder 0"/>
-          <p:cNvSpPr>
-            <a:spLocks noGrp="1"/>
-          </p:cNvSpPr>
-          <p:nvPr>
-            <p:ph type="sldNum" sz="quarter" idx="4294967295"/>
-          </p:nvPr>
-        </p:nvSpPr>
-        <p:spPr>
-          <a:xfrm>
-            <a:off x="27432" y="91440"/>
-            <a:ext cx="585216" cy="475488"/>
-          </a:xfrm>
-          <a:prstGeom prst="rect">
-            <a:avLst/>
-          </a:prstGeom>
-          <a:extLst>
-            <a:ext uri="{C572A759-6A51-4108-AA02-DFA0A04FC94B}">
-              <ma14:wrappingTextBoxFlag xmlns:ma14="http://schemas.microsoft.com/office/mac/drawingml/2011/main" val="0"/>
-            </a:ext>
-          </a:extLst>
-        </p:spPr>
-        <p:txBody>
-          <a:bodyPr/>
-          <a:lstStyle>
-            <a:lvl1pPr>
-              <a:defRPr sz="2000">
-                <a:solidFill>
-                  <a:srgbClr val="FFFFFF"/>
-                </a:solidFill>
-                <a:latin typeface="Calibri"/>
-                <a:ea typeface="Calibri"/>
-                <a:cs typeface="Calibri"/>
-              </a:defRPr>
-            </a:lvl1pPr>
-          </a:lstStyle>
-          <a:p>
-            <a:pPr algn="ctr"/>
-            <a:fld id="{F7021451-1387-4CA6-816F-3879F97B5CBC}" type="slidenum">
-              <a:rPr b="1" lang="en-US"/>
-              <a:t>51</a:t>
+              <a:t>54</a:t>
             </a:fld>
             <a:endParaRPr lang="en-US"/>
           </a:p>
